--- a/docs/PRESENTATION.pptx
+++ b/docs/PRESENTATION.pptx
@@ -6,20 +6,17 @@
   </p:sldMasterIdLst>
   <p:sldIdLst>
     <p:sldId id="256" r:id="rId7"/>
-    <p:sldId id="257" r:id="rId8"/>
-    <p:sldId id="258" r:id="rId9"/>
-    <p:sldId id="259" r:id="rId10"/>
-    <p:sldId id="260" r:id="rId11"/>
-    <p:sldId id="261" r:id="rId12"/>
-    <p:sldId id="262" r:id="rId13"/>
-    <p:sldId id="263" r:id="rId14"/>
-    <p:sldId id="264" r:id="rId15"/>
-    <p:sldId id="265" r:id="rId16"/>
-    <p:sldId id="266" r:id="rId17"/>
-    <p:sldId id="267" r:id="rId18"/>
-    <p:sldId id="268" r:id="rId19"/>
+    <p:sldId id="257" r:id="rId9"/>
+    <p:sldId id="258" r:id="rId10"/>
+    <p:sldId id="259" r:id="rId11"/>
+    <p:sldId id="260" r:id="rId12"/>
+    <p:sldId id="261" r:id="rId13"/>
+    <p:sldId id="262" r:id="rId14"/>
+    <p:sldId id="263" r:id="rId15"/>
+    <p:sldId id="264" r:id="rId16"/>
+    <p:sldId id="265" r:id="rId17"/>
   </p:sldIdLst>
-  <p:sldSz cx="9144000" cy="6858000" type="screen4x3"/>
+  <p:sldSz cx="12191695" cy="6858000" type="screen4x3"/>
   <p:notesSz cx="6858000" cy="9144000"/>
   <p:defaultTextStyle>
     <a:defPPr>
@@ -117,6 +114,1056 @@
     </a:lvl9pPr>
   </p:defaultTextStyle>
 </p:presentation>
+</file>
+
+<file path=ppt/notesMasters/notesMaster1.xml><?xml version="1.0" encoding="utf-8"?>
+<p:notesMaster xmlns:a="http://schemas.openxmlformats.org/drawingml/2006/main" xmlns:p="http://schemas.openxmlformats.org/presentationml/2006/main" xmlns:r="http://schemas.openxmlformats.org/officeDocument/2006/relationships">
+  <p:cSld>
+    <p:bg>
+      <p:bgRef idx="1001">
+        <a:schemeClr val="bg1"/>
+      </p:bgRef>
+    </p:bg>
+    <p:spTree>
+      <p:nvGrpSpPr>
+        <p:cNvPr id="1" name=""/>
+        <p:cNvGrpSpPr/>
+        <p:nvPr/>
+      </p:nvGrpSpPr>
+      <p:grpSpPr>
+        <a:xfrm>
+          <a:off x="0" y="0"/>
+          <a:ext cx="0" cy="0"/>
+          <a:chOff x="0" y="0"/>
+          <a:chExt cx="0" cy="0"/>
+        </a:xfrm>
+      </p:grpSpPr>
+      <p:sp>
+        <p:nvSpPr>
+          <p:cNvPr id="2" name="Header Placeholder 1"/>
+          <p:cNvSpPr>
+            <a:spLocks noGrp="1"/>
+          </p:cNvSpPr>
+          <p:nvPr>
+            <p:ph type="hdr" sz="quarter"/>
+          </p:nvPr>
+        </p:nvSpPr>
+        <p:spPr>
+          <a:xfrm>
+            <a:off x="0" y="0"/>
+            <a:ext cx="2971800" cy="457200"/>
+          </a:xfrm>
+          <a:prstGeom prst="rect">
+            <a:avLst/>
+          </a:prstGeom>
+        </p:spPr>
+        <p:txBody>
+          <a:bodyPr vert="horz" lIns="91440" tIns="45720" rIns="91440" bIns="45720" rtlCol="0"/>
+          <a:lstStyle>
+            <a:lvl1pPr algn="l">
+              <a:defRPr sz="1200"/>
+            </a:lvl1pPr>
+          </a:lstStyle>
+          <a:p>
+            <a:endParaRPr lang="en-US"/>
+          </a:p>
+        </p:txBody>
+      </p:sp>
+      <p:sp>
+        <p:nvSpPr>
+          <p:cNvPr id="3" name="Date Placeholder 2"/>
+          <p:cNvSpPr>
+            <a:spLocks noGrp="1"/>
+          </p:cNvSpPr>
+          <p:nvPr>
+            <p:ph type="dt" idx="1"/>
+          </p:nvPr>
+        </p:nvSpPr>
+        <p:spPr>
+          <a:xfrm>
+            <a:off x="3884613" y="0"/>
+            <a:ext cx="2971800" cy="457200"/>
+          </a:xfrm>
+          <a:prstGeom prst="rect">
+            <a:avLst/>
+          </a:prstGeom>
+        </p:spPr>
+        <p:txBody>
+          <a:bodyPr vert="horz" lIns="91440" tIns="45720" rIns="91440" bIns="45720" rtlCol="0"/>
+          <a:lstStyle>
+            <a:lvl1pPr algn="r">
+              <a:defRPr sz="1200"/>
+            </a:lvl1pPr>
+          </a:lstStyle>
+          <a:p>
+            <a:fld id="{0F89C1C7-3DCD-1040-A9CF-14679D8B5DDD}" type="datetimeFigureOut">
+              <a:rPr lang="en-US" smtClean="0"/>
+              <a:t>10/17/16</a:t>
+            </a:fld>
+            <a:endParaRPr lang="en-US"/>
+          </a:p>
+        </p:txBody>
+      </p:sp>
+      <p:sp>
+        <p:nvSpPr>
+          <p:cNvPr id="4" name="Slide Image Placeholder 3"/>
+          <p:cNvSpPr>
+            <a:spLocks noGrp="1" noRot="1" noChangeAspect="1"/>
+          </p:cNvSpPr>
+          <p:nvPr>
+            <p:ph type="sldImg" idx="2"/>
+          </p:nvPr>
+        </p:nvSpPr>
+        <p:spPr>
+          <a:xfrm>
+            <a:off x="1143000" y="685800"/>
+            <a:ext cx="4572000" cy="3429000"/>
+          </a:xfrm>
+          <a:prstGeom prst="rect">
+            <a:avLst/>
+          </a:prstGeom>
+          <a:noFill/>
+          <a:ln w="12700">
+            <a:solidFill>
+              <a:prstClr val="black"/>
+            </a:solidFill>
+          </a:ln>
+        </p:spPr>
+        <p:txBody>
+          <a:bodyPr vert="horz" lIns="91440" tIns="45720" rIns="91440" bIns="45720" rtlCol="0" anchor="ctr"/>
+          <a:lstStyle/>
+          <a:p>
+            <a:endParaRPr lang="en-US"/>
+          </a:p>
+        </p:txBody>
+      </p:sp>
+      <p:sp>
+        <p:nvSpPr>
+          <p:cNvPr id="5" name="Notes Placeholder 4"/>
+          <p:cNvSpPr>
+            <a:spLocks noGrp="1"/>
+          </p:cNvSpPr>
+          <p:nvPr>
+            <p:ph type="body" sz="quarter" idx="3"/>
+          </p:nvPr>
+        </p:nvSpPr>
+        <p:spPr>
+          <a:xfrm>
+            <a:off x="685800" y="4343400"/>
+            <a:ext cx="5486400" cy="4114800"/>
+          </a:xfrm>
+          <a:prstGeom prst="rect">
+            <a:avLst/>
+          </a:prstGeom>
+        </p:spPr>
+        <p:txBody>
+          <a:bodyPr vert="horz" lIns="91440" tIns="45720" rIns="91440" bIns="45720" rtlCol="0"/>
+          <a:lstStyle/>
+          <a:p>
+            <a:pPr lvl="0"/>
+            <a:r>
+              <a:rPr lang="en-US" smtClean="0"/>
+              <a:t>Click to edit Master text styles</a:t>
+            </a:r>
+          </a:p>
+          <a:p>
+            <a:pPr lvl="1"/>
+            <a:r>
+              <a:rPr lang="en-US" smtClean="0"/>
+              <a:t>Second level</a:t>
+            </a:r>
+          </a:p>
+          <a:p>
+            <a:pPr lvl="2"/>
+            <a:r>
+              <a:rPr lang="en-US" smtClean="0"/>
+              <a:t>Third level</a:t>
+            </a:r>
+          </a:p>
+          <a:p>
+            <a:pPr lvl="3"/>
+            <a:r>
+              <a:rPr lang="en-US" smtClean="0"/>
+              <a:t>Fourth level</a:t>
+            </a:r>
+          </a:p>
+          <a:p>
+            <a:pPr lvl="4"/>
+            <a:r>
+              <a:rPr lang="en-US" smtClean="0"/>
+              <a:t>Fifth level</a:t>
+            </a:r>
+            <a:endParaRPr lang="en-US"/>
+          </a:p>
+        </p:txBody>
+      </p:sp>
+      <p:sp>
+        <p:nvSpPr>
+          <p:cNvPr id="6" name="Footer Placeholder 5"/>
+          <p:cNvSpPr>
+            <a:spLocks noGrp="1"/>
+          </p:cNvSpPr>
+          <p:nvPr>
+            <p:ph type="ftr" sz="quarter" idx="4"/>
+          </p:nvPr>
+        </p:nvSpPr>
+        <p:spPr>
+          <a:xfrm>
+            <a:off x="0" y="8685213"/>
+            <a:ext cx="2971800" cy="457200"/>
+          </a:xfrm>
+          <a:prstGeom prst="rect">
+            <a:avLst/>
+          </a:prstGeom>
+        </p:spPr>
+        <p:txBody>
+          <a:bodyPr vert="horz" lIns="91440" tIns="45720" rIns="91440" bIns="45720" rtlCol="0" anchor="b"/>
+          <a:lstStyle>
+            <a:lvl1pPr algn="l">
+              <a:defRPr sz="1200"/>
+            </a:lvl1pPr>
+          </a:lstStyle>
+          <a:p>
+            <a:endParaRPr lang="en-US"/>
+          </a:p>
+        </p:txBody>
+      </p:sp>
+      <p:sp>
+        <p:nvSpPr>
+          <p:cNvPr id="7" name="Slide Number Placeholder 6"/>
+          <p:cNvSpPr>
+            <a:spLocks noGrp="1"/>
+          </p:cNvSpPr>
+          <p:nvPr>
+            <p:ph type="sldNum" sz="quarter" idx="5"/>
+          </p:nvPr>
+        </p:nvSpPr>
+        <p:spPr>
+          <a:xfrm>
+            <a:off x="3884613" y="8685213"/>
+            <a:ext cx="2971800" cy="457200"/>
+          </a:xfrm>
+          <a:prstGeom prst="rect">
+            <a:avLst/>
+          </a:prstGeom>
+        </p:spPr>
+        <p:txBody>
+          <a:bodyPr vert="horz" lIns="91440" tIns="45720" rIns="91440" bIns="45720" rtlCol="0" anchor="b"/>
+          <a:lstStyle>
+            <a:lvl1pPr algn="r">
+              <a:defRPr sz="1200"/>
+            </a:lvl1pPr>
+          </a:lstStyle>
+          <a:p>
+            <a:fld id="{BB5E49A5-4136-284D-997B-48E1D791AD67}" type="slidenum">
+              <a:rPr lang="en-US" smtClean="0"/>
+              <a:t>‹#›</a:t>
+            </a:fld>
+            <a:endParaRPr lang="en-US"/>
+          </a:p>
+        </p:txBody>
+      </p:sp>
+    </p:spTree>
+    <p:extLst>
+      <p:ext uri="{BB962C8B-B14F-4D97-AF65-F5344CB8AC3E}">
+        <p14:creationId xmlns:p14="http://schemas.microsoft.com/office/powerpoint/2010/main" val="2623252185"/>
+      </p:ext>
+    </p:extLst>
+  </p:cSld>
+  <p:clrMap bg1="lt1" tx1="dk1" bg2="lt2" tx2="dk2" accent1="accent1" accent2="accent2" accent3="accent3" accent4="accent4" accent5="accent5" accent6="accent6" hlink="hlink" folHlink="folHlink"/>
+  <p:notesStyle>
+    <a:lvl1pPr marL="0" algn="l" defTabSz="457200" rtl="0" eaLnBrk="1" latinLnBrk="0" hangingPunct="1">
+      <a:defRPr sz="1200" kern="1200">
+        <a:solidFill>
+          <a:schemeClr val="tx1"/>
+        </a:solidFill>
+        <a:latin typeface="+mn-lt"/>
+        <a:ea typeface="+mn-ea"/>
+        <a:cs typeface="+mn-cs"/>
+      </a:defRPr>
+    </a:lvl1pPr>
+    <a:lvl2pPr marL="457200" algn="l" defTabSz="457200" rtl="0" eaLnBrk="1" latinLnBrk="0" hangingPunct="1">
+      <a:defRPr sz="1200" kern="1200">
+        <a:solidFill>
+          <a:schemeClr val="tx1"/>
+        </a:solidFill>
+        <a:latin typeface="+mn-lt"/>
+        <a:ea typeface="+mn-ea"/>
+        <a:cs typeface="+mn-cs"/>
+      </a:defRPr>
+    </a:lvl2pPr>
+    <a:lvl3pPr marL="914400" algn="l" defTabSz="457200" rtl="0" eaLnBrk="1" latinLnBrk="0" hangingPunct="1">
+      <a:defRPr sz="1200" kern="1200">
+        <a:solidFill>
+          <a:schemeClr val="tx1"/>
+        </a:solidFill>
+        <a:latin typeface="+mn-lt"/>
+        <a:ea typeface="+mn-ea"/>
+        <a:cs typeface="+mn-cs"/>
+      </a:defRPr>
+    </a:lvl3pPr>
+    <a:lvl4pPr marL="1371600" algn="l" defTabSz="457200" rtl="0" eaLnBrk="1" latinLnBrk="0" hangingPunct="1">
+      <a:defRPr sz="1200" kern="1200">
+        <a:solidFill>
+          <a:schemeClr val="tx1"/>
+        </a:solidFill>
+        <a:latin typeface="+mn-lt"/>
+        <a:ea typeface="+mn-ea"/>
+        <a:cs typeface="+mn-cs"/>
+      </a:defRPr>
+    </a:lvl4pPr>
+    <a:lvl5pPr marL="1828800" algn="l" defTabSz="457200" rtl="0" eaLnBrk="1" latinLnBrk="0" hangingPunct="1">
+      <a:defRPr sz="1200" kern="1200">
+        <a:solidFill>
+          <a:schemeClr val="tx1"/>
+        </a:solidFill>
+        <a:latin typeface="+mn-lt"/>
+        <a:ea typeface="+mn-ea"/>
+        <a:cs typeface="+mn-cs"/>
+      </a:defRPr>
+    </a:lvl5pPr>
+    <a:lvl6pPr marL="2286000" algn="l" defTabSz="457200" rtl="0" eaLnBrk="1" latinLnBrk="0" hangingPunct="1">
+      <a:defRPr sz="1200" kern="1200">
+        <a:solidFill>
+          <a:schemeClr val="tx1"/>
+        </a:solidFill>
+        <a:latin typeface="+mn-lt"/>
+        <a:ea typeface="+mn-ea"/>
+        <a:cs typeface="+mn-cs"/>
+      </a:defRPr>
+    </a:lvl6pPr>
+    <a:lvl7pPr marL="2743200" algn="l" defTabSz="457200" rtl="0" eaLnBrk="1" latinLnBrk="0" hangingPunct="1">
+      <a:defRPr sz="1200" kern="1200">
+        <a:solidFill>
+          <a:schemeClr val="tx1"/>
+        </a:solidFill>
+        <a:latin typeface="+mn-lt"/>
+        <a:ea typeface="+mn-ea"/>
+        <a:cs typeface="+mn-cs"/>
+      </a:defRPr>
+    </a:lvl7pPr>
+    <a:lvl8pPr marL="3200400" algn="l" defTabSz="457200" rtl="0" eaLnBrk="1" latinLnBrk="0" hangingPunct="1">
+      <a:defRPr sz="1200" kern="1200">
+        <a:solidFill>
+          <a:schemeClr val="tx1"/>
+        </a:solidFill>
+        <a:latin typeface="+mn-lt"/>
+        <a:ea typeface="+mn-ea"/>
+        <a:cs typeface="+mn-cs"/>
+      </a:defRPr>
+    </a:lvl8pPr>
+    <a:lvl9pPr marL="3657600" algn="l" defTabSz="457200" rtl="0" eaLnBrk="1" latinLnBrk="0" hangingPunct="1">
+      <a:defRPr sz="1200" kern="1200">
+        <a:solidFill>
+          <a:schemeClr val="tx1"/>
+        </a:solidFill>
+        <a:latin typeface="+mn-lt"/>
+        <a:ea typeface="+mn-ea"/>
+        <a:cs typeface="+mn-cs"/>
+      </a:defRPr>
+    </a:lvl9pPr>
+  </p:notesStyle>
+</p:notesMaster>
+</file>
+
+<file path=ppt/notesSlides/notesSlide1.xml><?xml version="1.0" encoding="utf-8"?>
+<p:notes xmlns:a="http://schemas.openxmlformats.org/drawingml/2006/main" xmlns:p="http://schemas.openxmlformats.org/presentationml/2006/main" xmlns:r="http://schemas.openxmlformats.org/officeDocument/2006/relationships">
+  <p:cSld>
+    <p:spTree>
+      <p:nvGrpSpPr>
+        <p:cNvPr id="1" name=""/>
+        <p:cNvGrpSpPr/>
+        <p:nvPr/>
+      </p:nvGrpSpPr>
+      <p:grpSpPr>
+        <a:xfrm>
+          <a:off x="0" y="0"/>
+          <a:ext cx="0" cy="0"/>
+          <a:chOff x="0" y="0"/>
+          <a:chExt cx="0" cy="0"/>
+        </a:xfrm>
+      </p:grpSpPr>
+      <p:sp>
+        <p:nvSpPr>
+          <p:cNvPr id="2" name="Slide Image Placeholder 1"/>
+          <p:cNvSpPr>
+            <a:spLocks noGrp="1"/>
+          </p:cNvSpPr>
+          <p:nvPr>
+            <p:ph type="sldImg" idx="2"/>
+          </p:nvPr>
+        </p:nvSpPr>
+        <p:spPr/>
+      </p:sp>
+      <p:sp>
+        <p:nvSpPr>
+          <p:cNvPr id="3" name="Notes Placeholder 2"/>
+          <p:cNvSpPr>
+            <a:spLocks noGrp="1"/>
+          </p:cNvSpPr>
+          <p:nvPr>
+            <p:ph type="body" idx="3" sz="quarter"/>
+          </p:nvPr>
+        </p:nvSpPr>
+        <p:spPr/>
+        <p:txBody>
+          <a:bodyPr/>
+          <a:lstStyle/>
+          <a:p>
+            <a:r>
+              <a:t>Welcome. This is my Habit &amp; Productivity Analytics API for COMP3011 CW1. I'll walk through architecture, key features, testing, deployment, and deliverables.</a:t>
+            </a:r>
+          </a:p>
+        </p:txBody>
+      </p:sp>
+      <p:sp>
+        <p:nvSpPr>
+          <p:cNvPr id="4" name="Slide Number Placeholder 3"/>
+          <p:cNvSpPr>
+            <a:spLocks noGrp="1"/>
+          </p:cNvSpPr>
+          <p:nvPr>
+            <p:ph type="sldNum" idx="5" sz="quarter"/>
+          </p:nvPr>
+        </p:nvSpPr>
+        <p:spPr/>
+      </p:sp>
+    </p:spTree>
+  </p:cSld>
+  <p:clrMapOvr>
+    <a:masterClrMapping/>
+  </p:clrMapOvr>
+</p:notes>
+</file>
+
+<file path=ppt/notesSlides/notesSlide10.xml><?xml version="1.0" encoding="utf-8"?>
+<p:notes xmlns:a="http://schemas.openxmlformats.org/drawingml/2006/main" xmlns:p="http://schemas.openxmlformats.org/presentationml/2006/main" xmlns:r="http://schemas.openxmlformats.org/officeDocument/2006/relationships">
+  <p:cSld>
+    <p:spTree>
+      <p:nvGrpSpPr>
+        <p:cNvPr id="1" name=""/>
+        <p:cNvGrpSpPr/>
+        <p:nvPr/>
+      </p:nvGrpSpPr>
+      <p:grpSpPr>
+        <a:xfrm>
+          <a:off x="0" y="0"/>
+          <a:ext cx="0" cy="0"/>
+          <a:chOff x="0" y="0"/>
+          <a:chExt cx="0" cy="0"/>
+        </a:xfrm>
+      </p:grpSpPr>
+      <p:sp>
+        <p:nvSpPr>
+          <p:cNvPr id="2" name="Slide Image Placeholder 1"/>
+          <p:cNvSpPr>
+            <a:spLocks noGrp="1"/>
+          </p:cNvSpPr>
+          <p:nvPr>
+            <p:ph type="sldImg" idx="2"/>
+          </p:nvPr>
+        </p:nvSpPr>
+        <p:spPr/>
+      </p:sp>
+      <p:sp>
+        <p:nvSpPr>
+          <p:cNvPr id="3" name="Notes Placeholder 2"/>
+          <p:cNvSpPr>
+            <a:spLocks noGrp="1"/>
+          </p:cNvSpPr>
+          <p:nvPr>
+            <p:ph type="body" idx="3" sz="quarter"/>
+          </p:nvPr>
+        </p:nvSpPr>
+        <p:spPr/>
+        <p:txBody>
+          <a:bodyPr/>
+          <a:lstStyle/>
+          <a:p>
+            <a:r>
+              <a:t>Wrap up: reiterate the key points — 12 endpoints, proper error handling, 14 tests, deployed on Render, complete documentation. Open for questions.</a:t>
+            </a:r>
+          </a:p>
+        </p:txBody>
+      </p:sp>
+      <p:sp>
+        <p:nvSpPr>
+          <p:cNvPr id="4" name="Slide Number Placeholder 3"/>
+          <p:cNvSpPr>
+            <a:spLocks noGrp="1"/>
+          </p:cNvSpPr>
+          <p:nvPr>
+            <p:ph type="sldNum" idx="5" sz="quarter"/>
+          </p:nvPr>
+        </p:nvSpPr>
+        <p:spPr/>
+      </p:sp>
+    </p:spTree>
+  </p:cSld>
+  <p:clrMapOvr>
+    <a:masterClrMapping/>
+  </p:clrMapOvr>
+</p:notes>
+</file>
+
+<file path=ppt/notesSlides/notesSlide2.xml><?xml version="1.0" encoding="utf-8"?>
+<p:notes xmlns:a="http://schemas.openxmlformats.org/drawingml/2006/main" xmlns:p="http://schemas.openxmlformats.org/presentationml/2006/main" xmlns:r="http://schemas.openxmlformats.org/officeDocument/2006/relationships">
+  <p:cSld>
+    <p:spTree>
+      <p:nvGrpSpPr>
+        <p:cNvPr id="1" name=""/>
+        <p:cNvGrpSpPr/>
+        <p:nvPr/>
+      </p:nvGrpSpPr>
+      <p:grpSpPr>
+        <a:xfrm>
+          <a:off x="0" y="0"/>
+          <a:ext cx="0" cy="0"/>
+          <a:chOff x="0" y="0"/>
+          <a:chExt cx="0" cy="0"/>
+        </a:xfrm>
+      </p:grpSpPr>
+      <p:sp>
+        <p:nvSpPr>
+          <p:cNvPr id="2" name="Slide Image Placeholder 1"/>
+          <p:cNvSpPr>
+            <a:spLocks noGrp="1"/>
+          </p:cNvSpPr>
+          <p:nvPr>
+            <p:ph type="sldImg" idx="2"/>
+          </p:nvPr>
+        </p:nvSpPr>
+        <p:spPr/>
+      </p:sp>
+      <p:sp>
+        <p:nvSpPr>
+          <p:cNvPr id="3" name="Notes Placeholder 2"/>
+          <p:cNvSpPr>
+            <a:spLocks noGrp="1"/>
+          </p:cNvSpPr>
+          <p:nvPr>
+            <p:ph type="body" idx="3" sz="quarter"/>
+          </p:nvPr>
+        </p:nvSpPr>
+        <p:spPr/>
+        <p:txBody>
+          <a:bodyPr/>
+          <a:lstStyle/>
+          <a:p>
+            <a:r>
+              <a:t>FastAPI chosen for auto-generated OpenAPI docs and high performance. SQLAlchemy ORM provides database abstraction. Alembic handles schema migrations. Auth is a simple API key in the X-API-Key header — 401 if missing, 403 if wrong. Frontend is vanilla JS so there's no build step — just static files served at /ui/.</a:t>
+            </a:r>
+          </a:p>
+        </p:txBody>
+      </p:sp>
+      <p:sp>
+        <p:nvSpPr>
+          <p:cNvPr id="4" name="Slide Number Placeholder 3"/>
+          <p:cNvSpPr>
+            <a:spLocks noGrp="1"/>
+          </p:cNvSpPr>
+          <p:nvPr>
+            <p:ph type="sldNum" idx="5" sz="quarter"/>
+          </p:nvPr>
+        </p:nvSpPr>
+        <p:spPr/>
+      </p:sp>
+    </p:spTree>
+  </p:cSld>
+  <p:clrMapOvr>
+    <a:masterClrMapping/>
+  </p:clrMapOvr>
+</p:notes>
+</file>
+
+<file path=ppt/notesSlides/notesSlide3.xml><?xml version="1.0" encoding="utf-8"?>
+<p:notes xmlns:a="http://schemas.openxmlformats.org/drawingml/2006/main" xmlns:p="http://schemas.openxmlformats.org/presentationml/2006/main" xmlns:r="http://schemas.openxmlformats.org/officeDocument/2006/relationships">
+  <p:cSld>
+    <p:spTree>
+      <p:nvGrpSpPr>
+        <p:cNvPr id="1" name=""/>
+        <p:cNvGrpSpPr/>
+        <p:nvPr/>
+      </p:nvGrpSpPr>
+      <p:grpSpPr>
+        <a:xfrm>
+          <a:off x="0" y="0"/>
+          <a:ext cx="0" cy="0"/>
+          <a:chOff x="0" y="0"/>
+          <a:chExt cx="0" cy="0"/>
+        </a:xfrm>
+      </p:grpSpPr>
+      <p:sp>
+        <p:nvSpPr>
+          <p:cNvPr id="2" name="Slide Image Placeholder 1"/>
+          <p:cNvSpPr>
+            <a:spLocks noGrp="1"/>
+          </p:cNvSpPr>
+          <p:nvPr>
+            <p:ph type="sldImg" idx="2"/>
+          </p:nvPr>
+        </p:nvSpPr>
+        <p:spPr/>
+      </p:sp>
+      <p:sp>
+        <p:nvSpPr>
+          <p:cNvPr id="3" name="Notes Placeholder 2"/>
+          <p:cNvSpPr>
+            <a:spLocks noGrp="1"/>
+          </p:cNvSpPr>
+          <p:nvPr>
+            <p:ph type="body" idx="3" sz="quarter"/>
+          </p:nvPr>
+        </p:nvSpPr>
+        <p:spPr/>
+        <p:txBody>
+          <a:bodyPr/>
+          <a:lstStyle/>
+          <a:p>
+            <a:r>
+              <a:t>The data model separates habits from logs. A habit defines what to track; a log records when it was done. The unique constraint on (habit_id, date) means trying to log the same habit twice on the same day returns 409 Conflict. This 'done-only' approach means missing dates simply mean the habit wasn't completed — no explicit 'skipped' entries needed, which keeps storage lean and streaks easy to compute.</a:t>
+            </a:r>
+          </a:p>
+        </p:txBody>
+      </p:sp>
+      <p:sp>
+        <p:nvSpPr>
+          <p:cNvPr id="4" name="Slide Number Placeholder 3"/>
+          <p:cNvSpPr>
+            <a:spLocks noGrp="1"/>
+          </p:cNvSpPr>
+          <p:nvPr>
+            <p:ph type="sldNum" idx="5" sz="quarter"/>
+          </p:nvPr>
+        </p:nvSpPr>
+        <p:spPr/>
+      </p:sp>
+    </p:spTree>
+  </p:cSld>
+  <p:clrMapOvr>
+    <a:masterClrMapping/>
+  </p:clrMapOvr>
+</p:notes>
+</file>
+
+<file path=ppt/notesSlides/notesSlide4.xml><?xml version="1.0" encoding="utf-8"?>
+<p:notes xmlns:a="http://schemas.openxmlformats.org/drawingml/2006/main" xmlns:p="http://schemas.openxmlformats.org/presentationml/2006/main" xmlns:r="http://schemas.openxmlformats.org/officeDocument/2006/relationships">
+  <p:cSld>
+    <p:spTree>
+      <p:nvGrpSpPr>
+        <p:cNvPr id="1" name=""/>
+        <p:cNvGrpSpPr/>
+        <p:nvPr/>
+      </p:nvGrpSpPr>
+      <p:grpSpPr>
+        <a:xfrm>
+          <a:off x="0" y="0"/>
+          <a:ext cx="0" cy="0"/>
+          <a:chOff x="0" y="0"/>
+          <a:chExt cx="0" cy="0"/>
+        </a:xfrm>
+      </p:grpSpPr>
+      <p:sp>
+        <p:nvSpPr>
+          <p:cNvPr id="2" name="Slide Image Placeholder 1"/>
+          <p:cNvSpPr>
+            <a:spLocks noGrp="1"/>
+          </p:cNvSpPr>
+          <p:nvPr>
+            <p:ph type="sldImg" idx="2"/>
+          </p:nvPr>
+        </p:nvSpPr>
+        <p:spPr/>
+      </p:sp>
+      <p:sp>
+        <p:nvSpPr>
+          <p:cNvPr id="3" name="Notes Placeholder 2"/>
+          <p:cNvSpPr>
+            <a:spLocks noGrp="1"/>
+          </p:cNvSpPr>
+          <p:nvPr>
+            <p:ph type="body" idx="3" sz="quarter"/>
+          </p:nvPr>
+        </p:nvSpPr>
+        <p:spPr/>
+        <p:txBody>
+          <a:bodyPr/>
+          <a:lstStyle/>
+          <a:p>
+            <a:r>
+              <a:t>12 distinct endpoints organised into three routers: habits, logs, analytics. All protected by X-API-Key except /health. The weekly summary accepts week in YYYY-WW or YYYY-Www format — validated by regex, returns 400 for invalid format or invalid ISO week number.</a:t>
+            </a:r>
+          </a:p>
+        </p:txBody>
+      </p:sp>
+      <p:sp>
+        <p:nvSpPr>
+          <p:cNvPr id="4" name="Slide Number Placeholder 3"/>
+          <p:cNvSpPr>
+            <a:spLocks noGrp="1"/>
+          </p:cNvSpPr>
+          <p:nvPr>
+            <p:ph type="sldNum" idx="5" sz="quarter"/>
+          </p:nvPr>
+        </p:nvSpPr>
+        <p:spPr/>
+      </p:sp>
+    </p:spTree>
+  </p:cSld>
+  <p:clrMapOvr>
+    <a:masterClrMapping/>
+  </p:clrMapOvr>
+</p:notes>
+</file>
+
+<file path=ppt/notesSlides/notesSlide5.xml><?xml version="1.0" encoding="utf-8"?>
+<p:notes xmlns:a="http://schemas.openxmlformats.org/drawingml/2006/main" xmlns:p="http://schemas.openxmlformats.org/presentationml/2006/main" xmlns:r="http://schemas.openxmlformats.org/officeDocument/2006/relationships">
+  <p:cSld>
+    <p:spTree>
+      <p:nvGrpSpPr>
+        <p:cNvPr id="1" name=""/>
+        <p:cNvGrpSpPr/>
+        <p:nvPr/>
+      </p:nvGrpSpPr>
+      <p:grpSpPr>
+        <a:xfrm>
+          <a:off x="0" y="0"/>
+          <a:ext cx="0" cy="0"/>
+          <a:chOff x="0" y="0"/>
+          <a:chExt cx="0" cy="0"/>
+        </a:xfrm>
+      </p:grpSpPr>
+      <p:sp>
+        <p:nvSpPr>
+          <p:cNvPr id="2" name="Slide Image Placeholder 1"/>
+          <p:cNvSpPr>
+            <a:spLocks noGrp="1"/>
+          </p:cNvSpPr>
+          <p:nvPr>
+            <p:ph type="sldImg" idx="2"/>
+          </p:nvPr>
+        </p:nvSpPr>
+        <p:spPr/>
+      </p:sp>
+      <p:sp>
+        <p:nvSpPr>
+          <p:cNvPr id="3" name="Notes Placeholder 2"/>
+          <p:cNvSpPr>
+            <a:spLocks noGrp="1"/>
+          </p:cNvSpPr>
+          <p:nvPr>
+            <p:ph type="body" idx="3" sz="quarter"/>
+          </p:nvPr>
+        </p:nvSpPr>
+        <p:spPr/>
+        <p:txBody>
+          <a:bodyPr/>
+          <a:lstStyle/>
+          <a:p>
+            <a:r>
+              <a:t>Proper HTTP semantics throughout. The 409 is particularly important — it's enforced by a database unique constraint on (habit_id, date), caught via IntegrityError in the logs router. The global exception handler in main.py catches any unhandled errors and returns a clean 500 JSON response.</a:t>
+            </a:r>
+          </a:p>
+        </p:txBody>
+      </p:sp>
+      <p:sp>
+        <p:nvSpPr>
+          <p:cNvPr id="4" name="Slide Number Placeholder 3"/>
+          <p:cNvSpPr>
+            <a:spLocks noGrp="1"/>
+          </p:cNvSpPr>
+          <p:nvPr>
+            <p:ph type="sldNum" idx="5" sz="quarter"/>
+          </p:nvPr>
+        </p:nvSpPr>
+        <p:spPr/>
+      </p:sp>
+    </p:spTree>
+  </p:cSld>
+  <p:clrMapOvr>
+    <a:masterClrMapping/>
+  </p:clrMapOvr>
+</p:notes>
+</file>
+
+<file path=ppt/notesSlides/notesSlide6.xml><?xml version="1.0" encoding="utf-8"?>
+<p:notes xmlns:a="http://schemas.openxmlformats.org/drawingml/2006/main" xmlns:p="http://schemas.openxmlformats.org/presentationml/2006/main" xmlns:r="http://schemas.openxmlformats.org/officeDocument/2006/relationships">
+  <p:cSld>
+    <p:spTree>
+      <p:nvGrpSpPr>
+        <p:cNvPr id="1" name=""/>
+        <p:cNvGrpSpPr/>
+        <p:nvPr/>
+      </p:nvGrpSpPr>
+      <p:grpSpPr>
+        <a:xfrm>
+          <a:off x="0" y="0"/>
+          <a:ext cx="0" cy="0"/>
+          <a:chOff x="0" y="0"/>
+          <a:chExt cx="0" cy="0"/>
+        </a:xfrm>
+      </p:grpSpPr>
+      <p:sp>
+        <p:nvSpPr>
+          <p:cNvPr id="2" name="Slide Image Placeholder 1"/>
+          <p:cNvSpPr>
+            <a:spLocks noGrp="1"/>
+          </p:cNvSpPr>
+          <p:nvPr>
+            <p:ph type="sldImg" idx="2"/>
+          </p:nvPr>
+        </p:nvSpPr>
+        <p:spPr/>
+      </p:sp>
+      <p:sp>
+        <p:nvSpPr>
+          <p:cNvPr id="3" name="Notes Placeholder 2"/>
+          <p:cNvSpPr>
+            <a:spLocks noGrp="1"/>
+          </p:cNvSpPr>
+          <p:nvPr>
+            <p:ph type="body" idx="3" sz="quarter"/>
+          </p:nvPr>
+        </p:nvSpPr>
+        <p:spPr/>
+        <p:txBody>
+          <a:bodyPr/>
+          <a:lstStyle/>
+          <a:p>
+            <a:r>
+              <a:t>14 tests across 3 files, all passing. Used pytest with FastAPI TestClient. The conftest.py provides an AuthenticatedTestClient that auto-injects the API key header. Tests cover happy paths, edge cases, and error conditions. No coverage report generated — I have not claimed any coverage percentage.</a:t>
+            </a:r>
+          </a:p>
+        </p:txBody>
+      </p:sp>
+      <p:sp>
+        <p:nvSpPr>
+          <p:cNvPr id="4" name="Slide Number Placeholder 3"/>
+          <p:cNvSpPr>
+            <a:spLocks noGrp="1"/>
+          </p:cNvSpPr>
+          <p:nvPr>
+            <p:ph type="sldNum" idx="5" sz="quarter"/>
+          </p:nvPr>
+        </p:nvSpPr>
+        <p:spPr/>
+      </p:sp>
+    </p:spTree>
+  </p:cSld>
+  <p:clrMapOvr>
+    <a:masterClrMapping/>
+  </p:clrMapOvr>
+</p:notes>
+</file>
+
+<file path=ppt/notesSlides/notesSlide7.xml><?xml version="1.0" encoding="utf-8"?>
+<p:notes xmlns:a="http://schemas.openxmlformats.org/drawingml/2006/main" xmlns:p="http://schemas.openxmlformats.org/presentationml/2006/main" xmlns:r="http://schemas.openxmlformats.org/officeDocument/2006/relationships">
+  <p:cSld>
+    <p:spTree>
+      <p:nvGrpSpPr>
+        <p:cNvPr id="1" name=""/>
+        <p:cNvGrpSpPr/>
+        <p:nvPr/>
+      </p:nvGrpSpPr>
+      <p:grpSpPr>
+        <a:xfrm>
+          <a:off x="0" y="0"/>
+          <a:ext cx="0" cy="0"/>
+          <a:chOff x="0" y="0"/>
+          <a:chExt cx="0" cy="0"/>
+        </a:xfrm>
+      </p:grpSpPr>
+      <p:sp>
+        <p:nvSpPr>
+          <p:cNvPr id="2" name="Slide Image Placeholder 1"/>
+          <p:cNvSpPr>
+            <a:spLocks noGrp="1"/>
+          </p:cNvSpPr>
+          <p:nvPr>
+            <p:ph type="sldImg" idx="2"/>
+          </p:nvPr>
+        </p:nvSpPr>
+        <p:spPr/>
+      </p:sp>
+      <p:sp>
+        <p:nvSpPr>
+          <p:cNvPr id="3" name="Notes Placeholder 2"/>
+          <p:cNvSpPr>
+            <a:spLocks noGrp="1"/>
+          </p:cNvSpPr>
+          <p:nvPr>
+            <p:ph type="body" idx="3" sz="quarter"/>
+          </p:nvPr>
+        </p:nvSpPr>
+        <p:spPr/>
+        <p:txBody>
+          <a:bodyPr/>
+          <a:lstStyle/>
+          <a:p>
+            <a:r>
+              <a:t>49 commits on main, using conventional commit prefixes. Key milestones: scaffold, models, deployment fix (Render had 'no such table' error which I fixed by calling create_all on startup), analytics 400 fix, auth, and frontend. The deployment incident was a real debugging challenge — Render doesn't run Alembic migrations automatically, so I added Base.metadata.create_all in the lifespan handler.</a:t>
+            </a:r>
+          </a:p>
+        </p:txBody>
+      </p:sp>
+      <p:sp>
+        <p:nvSpPr>
+          <p:cNvPr id="4" name="Slide Number Placeholder 3"/>
+          <p:cNvSpPr>
+            <a:spLocks noGrp="1"/>
+          </p:cNvSpPr>
+          <p:nvPr>
+            <p:ph type="sldNum" idx="5" sz="quarter"/>
+          </p:nvPr>
+        </p:nvSpPr>
+        <p:spPr/>
+      </p:sp>
+    </p:spTree>
+  </p:cSld>
+  <p:clrMapOvr>
+    <a:masterClrMapping/>
+  </p:clrMapOvr>
+</p:notes>
+</file>
+
+<file path=ppt/notesSlides/notesSlide8.xml><?xml version="1.0" encoding="utf-8"?>
+<p:notes xmlns:a="http://schemas.openxmlformats.org/drawingml/2006/main" xmlns:p="http://schemas.openxmlformats.org/presentationml/2006/main" xmlns:r="http://schemas.openxmlformats.org/officeDocument/2006/relationships">
+  <p:cSld>
+    <p:spTree>
+      <p:nvGrpSpPr>
+        <p:cNvPr id="1" name=""/>
+        <p:cNvGrpSpPr/>
+        <p:nvPr/>
+      </p:nvGrpSpPr>
+      <p:grpSpPr>
+        <a:xfrm>
+          <a:off x="0" y="0"/>
+          <a:ext cx="0" cy="0"/>
+          <a:chOff x="0" y="0"/>
+          <a:chExt cx="0" cy="0"/>
+        </a:xfrm>
+      </p:grpSpPr>
+      <p:sp>
+        <p:nvSpPr>
+          <p:cNvPr id="2" name="Slide Image Placeholder 1"/>
+          <p:cNvSpPr>
+            <a:spLocks noGrp="1"/>
+          </p:cNvSpPr>
+          <p:nvPr>
+            <p:ph type="sldImg" idx="2"/>
+          </p:nvPr>
+        </p:nvSpPr>
+        <p:spPr/>
+      </p:sp>
+      <p:sp>
+        <p:nvSpPr>
+          <p:cNvPr id="3" name="Notes Placeholder 2"/>
+          <p:cNvSpPr>
+            <a:spLocks noGrp="1"/>
+          </p:cNvSpPr>
+          <p:nvPr>
+            <p:ph type="body" idx="3" sz="quarter"/>
+          </p:nvPr>
+        </p:nvSpPr>
+        <p:spPr/>
+        <p:txBody>
+          <a:bodyPr/>
+          <a:lstStyle/>
+          <a:p>
+            <a:r>
+              <a:t>Deployed on Render free tier. The big incident was the 'no such table' 500 error. Render doesn't run Alembic upgrade head automatically, and the SQLite file was fresh each deploy. Solution: call create_all on startup in the lifespan context manager. This is idempotent — it only creates tables that don't exist yet.</a:t>
+            </a:r>
+          </a:p>
+        </p:txBody>
+      </p:sp>
+      <p:sp>
+        <p:nvSpPr>
+          <p:cNvPr id="4" name="Slide Number Placeholder 3"/>
+          <p:cNvSpPr>
+            <a:spLocks noGrp="1"/>
+          </p:cNvSpPr>
+          <p:nvPr>
+            <p:ph type="sldNum" idx="5" sz="quarter"/>
+          </p:nvPr>
+        </p:nvSpPr>
+        <p:spPr/>
+      </p:sp>
+    </p:spTree>
+  </p:cSld>
+  <p:clrMapOvr>
+    <a:masterClrMapping/>
+  </p:clrMapOvr>
+</p:notes>
+</file>
+
+<file path=ppt/notesSlides/notesSlide9.xml><?xml version="1.0" encoding="utf-8"?>
+<p:notes xmlns:a="http://schemas.openxmlformats.org/drawingml/2006/main" xmlns:p="http://schemas.openxmlformats.org/presentationml/2006/main" xmlns:r="http://schemas.openxmlformats.org/officeDocument/2006/relationships">
+  <p:cSld>
+    <p:spTree>
+      <p:nvGrpSpPr>
+        <p:cNvPr id="1" name=""/>
+        <p:cNvGrpSpPr/>
+        <p:nvPr/>
+      </p:nvGrpSpPr>
+      <p:grpSpPr>
+        <a:xfrm>
+          <a:off x="0" y="0"/>
+          <a:ext cx="0" cy="0"/>
+          <a:chOff x="0" y="0"/>
+          <a:chExt cx="0" cy="0"/>
+        </a:xfrm>
+      </p:grpSpPr>
+      <p:sp>
+        <p:nvSpPr>
+          <p:cNvPr id="2" name="Slide Image Placeholder 1"/>
+          <p:cNvSpPr>
+            <a:spLocks noGrp="1"/>
+          </p:cNvSpPr>
+          <p:nvPr>
+            <p:ph type="sldImg" idx="2"/>
+          </p:nvPr>
+        </p:nvSpPr>
+        <p:spPr/>
+      </p:sp>
+      <p:sp>
+        <p:nvSpPr>
+          <p:cNvPr id="3" name="Notes Placeholder 2"/>
+          <p:cNvSpPr>
+            <a:spLocks noGrp="1"/>
+          </p:cNvSpPr>
+          <p:nvPr>
+            <p:ph type="body" idx="3" sz="quarter"/>
+          </p:nvPr>
+        </p:nvSpPr>
+        <p:spPr/>
+        <p:txBody>
+          <a:bodyPr/>
+          <a:lstStyle/>
+          <a:p>
+            <a:r>
+              <a:t>All deliverables present in the docs/ folder and the repo root. GenAI declaration covers both ChatGPT and GitHub Copilot usage with percentage breakdown. Conversation logs include 3 ChatGPT examples and 3 Copilot examples with before/after code.</a:t>
+            </a:r>
+          </a:p>
+        </p:txBody>
+      </p:sp>
+      <p:sp>
+        <p:nvSpPr>
+          <p:cNvPr id="4" name="Slide Number Placeholder 3"/>
+          <p:cNvSpPr>
+            <a:spLocks noGrp="1"/>
+          </p:cNvSpPr>
+          <p:nvPr>
+            <p:ph type="sldNum" idx="5" sz="quarter"/>
+          </p:nvPr>
+        </p:nvSpPr>
+        <p:spPr/>
+      </p:sp>
+    </p:spTree>
+  </p:cSld>
+  <p:clrMapOvr>
+    <a:masterClrMapping/>
+  </p:clrMapOvr>
+</p:notes>
 </file>
 
 <file path=ppt/slideLayouts/slideLayout1.xml><?xml version="1.0" encoding="utf-8"?>
@@ -3096,7 +4143,7 @@
     <p:bg>
       <p:bgPr>
         <a:solidFill>
-          <a:srgbClr val="0066CC"/>
+          <a:srgbClr val="F5F7FA"/>
         </a:solidFill>
         <a:effectLst/>
       </p:bgPr>
@@ -3110,94 +4157,6 @@
       <p:grpSpPr/>
       <p:sp>
         <p:nvSpPr>
-          <p:cNvPr id="2" name="TextBox 1"/>
-          <p:cNvSpPr txBox="1"/>
-          <p:nvPr/>
-        </p:nvSpPr>
-        <p:spPr>
-          <a:xfrm>
-            <a:off x="457200" y="2286000"/>
-            <a:ext cx="8229600" cy="1371600"/>
-          </a:xfrm>
-          <a:prstGeom prst="rect">
-            <a:avLst/>
-          </a:prstGeom>
-          <a:noFill/>
-        </p:spPr>
-        <p:txBody>
-          <a:bodyPr wrap="square">
-            <a:spAutoFit/>
-          </a:bodyPr>
-          <a:lstStyle/>
-          <a:p>
-            <a:pPr algn="ctr">
-              <a:defRPr sz="5400" b="1">
-                <a:solidFill>
-                  <a:srgbClr val="FFFFFF"/>
-                </a:solidFill>
-              </a:defRPr>
-            </a:pPr>
-            <a:r>
-              <a:t>Habit &amp; Productivity Analytics API</a:t>
-            </a:r>
-          </a:p>
-        </p:txBody>
-      </p:sp>
-      <p:sp>
-        <p:nvSpPr>
-          <p:cNvPr id="3" name="TextBox 2"/>
-          <p:cNvSpPr txBox="1"/>
-          <p:nvPr/>
-        </p:nvSpPr>
-        <p:spPr>
-          <a:xfrm>
-            <a:off x="457200" y="3840480"/>
-            <a:ext cx="8229600" cy="1371600"/>
-          </a:xfrm>
-          <a:prstGeom prst="rect">
-            <a:avLst/>
-          </a:prstGeom>
-          <a:noFill/>
-        </p:spPr>
-        <p:txBody>
-          <a:bodyPr wrap="square">
-            <a:spAutoFit/>
-          </a:bodyPr>
-          <a:lstStyle/>
-          <a:p>
-            <a:pPr algn="ctr">
-              <a:defRPr sz="2800">
-                <a:solidFill>
-                  <a:srgbClr val="FFFFFF"/>
-                </a:solidFill>
-              </a:defRPr>
-            </a:pPr>
-            <a:r>
-              <a:t>COMP3011 Coursework 1</a:t>
-            </a:r>
-          </a:p>
-        </p:txBody>
-      </p:sp>
-    </p:spTree>
-  </p:cSld>
-  <p:clrMapOvr>
-    <a:masterClrMapping/>
-  </p:clrMapOvr>
-</p:sld>
-</file>
-
-<file path=ppt/slides/slide10.xml><?xml version="1.0" encoding="utf-8"?>
-<p:sld xmlns:a="http://schemas.openxmlformats.org/drawingml/2006/main" xmlns:p="http://schemas.openxmlformats.org/presentationml/2006/main" xmlns:r="http://schemas.openxmlformats.org/officeDocument/2006/relationships">
-  <p:cSld>
-    <p:spTree>
-      <p:nvGrpSpPr>
-        <p:cNvPr id="1" name=""/>
-        <p:cNvGrpSpPr/>
-        <p:nvPr/>
-      </p:nvGrpSpPr>
-      <p:grpSpPr/>
-      <p:sp>
-        <p:nvSpPr>
           <p:cNvPr id="2" name="Rectangle 1"/>
           <p:cNvSpPr/>
           <p:nvPr/>
@@ -3205,18 +4164,16 @@
         <p:spPr>
           <a:xfrm>
             <a:off x="0" y="0"/>
-            <a:ext cx="9144000" cy="1097280"/>
+            <a:ext cx="12191695" cy="3840480"/>
           </a:xfrm>
           <a:prstGeom prst="rect">
             <a:avLst/>
           </a:prstGeom>
           <a:solidFill>
-            <a:srgbClr val="0066CC"/>
+            <a:srgbClr val="667EEA"/>
           </a:solidFill>
           <a:ln>
-            <a:solidFill>
-              <a:srgbClr val="0066CC"/>
-            </a:solidFill>
+            <a:noFill/>
           </a:ln>
         </p:spPr>
         <p:style>
@@ -3234,24 +4191,30 @@
           </a:fontRef>
         </p:style>
         <p:txBody>
-          <a:bodyPr rtlCol="0" anchor="ctr"/>
-          <a:lstStyle/>
-          <a:p>
-            <a:pPr algn="ctr">
-              <a:spcBef>
-                <a:spcPts val="1000"/>
-              </a:spcBef>
-              <a:spcAft>
-                <a:spcPts val="1000"/>
-              </a:spcAft>
-              <a:defRPr sz="4000" b="1">
+          <a:bodyPr rtlCol="0" anchor="ctr" wrap="square" lIns="914400" tIns="731520"/>
+          <a:lstStyle/>
+          <a:p>
+            <a:pPr algn="l">
+              <a:defRPr sz="4400" b="1">
                 <a:solidFill>
                   <a:srgbClr val="FFFFFF"/>
                 </a:solidFill>
               </a:defRPr>
             </a:pPr>
             <a:r>
-              <a:t>Performance Metrics</a:t>
+              <a:t>Habit &amp; Productivity Analytics API</a:t>
+            </a:r>
+          </a:p>
+          <a:p>
+            <a:pPr algn="l">
+              <a:defRPr sz="2200">
+                <a:solidFill>
+                  <a:srgbClr val="CBD5F0"/>
+                </a:solidFill>
+              </a:defRPr>
+            </a:pPr>
+            <a:r>
+              <a:t>COMP3011 — Web Services &amp; Web Data  ·  Coursework 1</a:t>
             </a:r>
           </a:p>
         </p:txBody>
@@ -3264,8 +4227,8 @@
         </p:nvSpPr>
         <p:spPr>
           <a:xfrm>
-            <a:off x="457200" y="1371600"/>
-            <a:ext cx="8229600" cy="5029200"/>
+            <a:off x="731520" y="4389120"/>
+            <a:ext cx="10515600" cy="4572000"/>
           </a:xfrm>
           <a:prstGeom prst="rect">
             <a:avLst/>
@@ -3279,92 +4242,62 @@
           <a:lstStyle/>
           <a:p>
             <a:pPr>
-              <a:spcBef>
-                <a:spcPts val="800"/>
-              </a:spcBef>
-              <a:spcAft>
-                <a:spcPts val="800"/>
-              </a:spcAft>
-              <a:defRPr sz="1800">
-                <a:solidFill>
-                  <a:srgbClr val="333333"/>
-                </a:solidFill>
-              </a:defRPr>
-            </a:pPr>
-            <a:r>
-              <a:t>⚡ Create Habit: ~15ms</a:t>
-            </a:r>
-          </a:p>
-          <a:p>
-            <a:pPr>
-              <a:spcBef>
-                <a:spcPts val="800"/>
-              </a:spcBef>
-              <a:spcAft>
-                <a:spcPts val="800"/>
-              </a:spcAft>
-              <a:defRPr sz="1800">
-                <a:solidFill>
-                  <a:srgbClr val="333333"/>
-                </a:solidFill>
-              </a:defRPr>
-            </a:pPr>
-            <a:r>
-              <a:t>⚡ Get Habit: ~5ms</a:t>
-            </a:r>
-          </a:p>
-          <a:p>
-            <a:pPr>
-              <a:spcBef>
-                <a:spcPts val="800"/>
-              </a:spcBef>
-              <a:spcAft>
-                <a:spcPts val="800"/>
-              </a:spcAft>
-              <a:defRPr sz="1800">
-                <a:solidFill>
-                  <a:srgbClr val="333333"/>
-                </a:solidFill>
-              </a:defRPr>
-            </a:pPr>
-            <a:r>
-              <a:t>⚡ List Habits: ~8ms</a:t>
-            </a:r>
-          </a:p>
-          <a:p>
-            <a:pPr>
-              <a:spcBef>
-                <a:spcPts val="800"/>
-              </a:spcBef>
-              <a:spcAft>
-                <a:spcPts val="800"/>
-              </a:spcAft>
-              <a:defRPr sz="1800">
-                <a:solidFill>
-                  <a:srgbClr val="333333"/>
-                </a:solidFill>
-              </a:defRPr>
-            </a:pPr>
-            <a:r>
-              <a:t>⚡ Streak Calculation: ~20ms</a:t>
-            </a:r>
-          </a:p>
-          <a:p>
-            <a:pPr>
-              <a:spcBef>
-                <a:spcPts val="800"/>
-              </a:spcBef>
-              <a:spcAft>
-                <a:spcPts val="800"/>
-              </a:spcAft>
-              <a:defRPr sz="1800">
-                <a:solidFill>
-                  <a:srgbClr val="333333"/>
-                </a:solidFill>
-              </a:defRPr>
-            </a:pPr>
-            <a:r>
-              <a:t>⚡ Weekly Summary: ~25ms</a:t>
+              <a:spcAft>
+                <a:spcPts val="800"/>
+              </a:spcAft>
+              <a:defRPr sz="2000">
+                <a:solidFill>
+                  <a:srgbClr val="2C3E50"/>
+                </a:solidFill>
+              </a:defRPr>
+            </a:pPr>
+            <a:r>
+              <a:t>Nicolas Issa</a:t>
+            </a:r>
+          </a:p>
+          <a:p>
+            <a:pPr>
+              <a:spcAft>
+                <a:spcPts val="800"/>
+              </a:spcAft>
+              <a:defRPr sz="2000">
+                <a:solidFill>
+                  <a:srgbClr val="2C3E50"/>
+                </a:solidFill>
+              </a:defRPr>
+            </a:pPr>
+            <a:r>
+              <a:t>GitHub: NicolasIssa1/COMP3011-CW1-HABIT-API</a:t>
+            </a:r>
+          </a:p>
+          <a:p>
+            <a:pPr>
+              <a:spcAft>
+                <a:spcPts val="800"/>
+              </a:spcAft>
+              <a:defRPr sz="2000">
+                <a:solidFill>
+                  <a:srgbClr val="2C3E50"/>
+                </a:solidFill>
+              </a:defRPr>
+            </a:pPr>
+            <a:r>
+              <a:t>Deployed: https://comp3011-cw1-habit-api.onrender.com</a:t>
+            </a:r>
+          </a:p>
+          <a:p>
+            <a:pPr>
+              <a:spcAft>
+                <a:spcPts val="800"/>
+              </a:spcAft>
+              <a:defRPr sz="2000">
+                <a:solidFill>
+                  <a:srgbClr val="2C3E50"/>
+                </a:solidFill>
+              </a:defRPr>
+            </a:pPr>
+            <a:r>
+              <a:t>March 2026</a:t>
             </a:r>
           </a:p>
         </p:txBody>
@@ -3377,9 +4310,17 @@
 </p:sld>
 </file>
 
-<file path=ppt/slides/slide11.xml><?xml version="1.0" encoding="utf-8"?>
+<file path=ppt/slides/slide10.xml><?xml version="1.0" encoding="utf-8"?>
 <p:sld xmlns:a="http://schemas.openxmlformats.org/drawingml/2006/main" xmlns:p="http://schemas.openxmlformats.org/presentationml/2006/main" xmlns:r="http://schemas.openxmlformats.org/officeDocument/2006/relationships">
   <p:cSld>
+    <p:bg>
+      <p:bgPr>
+        <a:solidFill>
+          <a:srgbClr val="F5F7FA"/>
+        </a:solidFill>
+        <a:effectLst/>
+      </p:bgPr>
+    </p:bg>
     <p:spTree>
       <p:nvGrpSpPr>
         <p:cNvPr id="1" name=""/>
@@ -3396,18 +4337,16 @@
         <p:spPr>
           <a:xfrm>
             <a:off x="0" y="0"/>
-            <a:ext cx="9144000" cy="1097280"/>
+            <a:ext cx="12191695" cy="3200400"/>
           </a:xfrm>
           <a:prstGeom prst="rect">
             <a:avLst/>
           </a:prstGeom>
           <a:solidFill>
-            <a:srgbClr val="0066CC"/>
+            <a:srgbClr val="667EEA"/>
           </a:solidFill>
           <a:ln>
-            <a:solidFill>
-              <a:srgbClr val="0066CC"/>
-            </a:solidFill>
+            <a:noFill/>
           </a:ln>
         </p:spPr>
         <p:style>
@@ -3425,24 +4364,108 @@
           </a:fontRef>
         </p:style>
         <p:txBody>
-          <a:bodyPr rtlCol="0" anchor="ctr"/>
-          <a:lstStyle/>
-          <a:p>
-            <a:pPr algn="ctr">
+          <a:bodyPr rtlCol="0" anchor="ctr" wrap="square" lIns="914400" tIns="548640"/>
+          <a:lstStyle/>
+          <a:p>
+            <a:pPr algn="l">
+              <a:defRPr sz="4000" b="1">
+                <a:solidFill>
+                  <a:srgbClr val="FFFFFF"/>
+                </a:solidFill>
+              </a:defRPr>
+            </a:pPr>
+            <a:r>
+              <a:t>Summary</a:t>
+            </a:r>
+          </a:p>
+          <a:p>
+            <a:pPr algn="l">
               <a:spcBef>
-                <a:spcPts val="1000"/>
+                <a:spcPts val="400"/>
               </a:spcBef>
-              <a:spcAft>
-                <a:spcPts val="1000"/>
-              </a:spcAft>
-              <a:defRPr sz="4000" b="1">
-                <a:solidFill>
-                  <a:srgbClr val="FFFFFF"/>
-                </a:solidFill>
-              </a:defRPr>
-            </a:pPr>
-            <a:r>
-              <a:t>Deployment Strategy</a:t>
+              <a:defRPr sz="2000">
+                <a:solidFill>
+                  <a:srgbClr val="E8EEF5"/>
+                </a:solidFill>
+              </a:defRPr>
+            </a:pPr>
+            <a:r>
+              <a:t>• RESTful API with 12 endpoints, proper HTTP semantics, API key auth</a:t>
+            </a:r>
+          </a:p>
+          <a:p>
+            <a:pPr algn="l">
+              <a:spcBef>
+                <a:spcPts val="400"/>
+              </a:spcBef>
+              <a:defRPr sz="2000">
+                <a:solidFill>
+                  <a:srgbClr val="E8EEF5"/>
+                </a:solidFill>
+              </a:defRPr>
+            </a:pPr>
+            <a:r>
+              <a:t>• Done-only logging with DB-enforced uniqueness (409 on duplicates)</a:t>
+            </a:r>
+          </a:p>
+          <a:p>
+            <a:pPr algn="l">
+              <a:spcBef>
+                <a:spcPts val="400"/>
+              </a:spcBef>
+              <a:defRPr sz="2000">
+                <a:solidFill>
+                  <a:srgbClr val="E8EEF5"/>
+                </a:solidFill>
+              </a:defRPr>
+            </a:pPr>
+            <a:r>
+              <a:t>• Streak + weekly summary analytics</a:t>
+            </a:r>
+          </a:p>
+          <a:p>
+            <a:pPr algn="l">
+              <a:spcBef>
+                <a:spcPts val="400"/>
+              </a:spcBef>
+              <a:defRPr sz="2000">
+                <a:solidFill>
+                  <a:srgbClr val="E8EEF5"/>
+                </a:solidFill>
+              </a:defRPr>
+            </a:pPr>
+            <a:r>
+              <a:t>• 14 automated tests — all passing</a:t>
+            </a:r>
+          </a:p>
+          <a:p>
+            <a:pPr algn="l">
+              <a:spcBef>
+                <a:spcPts val="400"/>
+              </a:spcBef>
+              <a:defRPr sz="2000">
+                <a:solidFill>
+                  <a:srgbClr val="E8EEF5"/>
+                </a:solidFill>
+              </a:defRPr>
+            </a:pPr>
+            <a:r>
+              <a:t>• Deployed on Render with live /docs, /ui/, /health</a:t>
+            </a:r>
+          </a:p>
+          <a:p>
+            <a:pPr algn="l">
+              <a:spcBef>
+                <a:spcPts val="400"/>
+              </a:spcBef>
+              <a:defRPr sz="2000">
+                <a:solidFill>
+                  <a:srgbClr val="E8EEF5"/>
+                </a:solidFill>
+              </a:defRPr>
+            </a:pPr>
+            <a:r>
+              <a:t>• 49 commits with conventional messages</a:t>
             </a:r>
           </a:p>
         </p:txBody>
@@ -3455,8 +4478,8 @@
         </p:nvSpPr>
         <p:spPr>
           <a:xfrm>
-            <a:off x="457200" y="1371600"/>
-            <a:ext cx="8229600" cy="5029200"/>
+            <a:off x="731520" y="3840480"/>
+            <a:ext cx="10515600" cy="4572000"/>
           </a:xfrm>
           <a:prstGeom prst="rect">
             <a:avLst/>
@@ -3470,92 +4493,74 @@
           <a:lstStyle/>
           <a:p>
             <a:pPr>
-              <a:spcBef>
-                <a:spcPts val="800"/>
-              </a:spcBef>
-              <a:spcAft>
-                <a:spcPts val="800"/>
-              </a:spcAft>
-              <a:defRPr sz="1800">
-                <a:solidFill>
-                  <a:srgbClr val="333333"/>
-                </a:solidFill>
-              </a:defRPr>
-            </a:pPr>
-            <a:r>
-              <a:t>🚀 Development: uvicorn with reload</a:t>
-            </a:r>
-          </a:p>
-          <a:p>
-            <a:pPr>
-              <a:spcBef>
-                <a:spcPts val="800"/>
-              </a:spcBef>
-              <a:spcAft>
-                <a:spcPts val="800"/>
-              </a:spcAft>
-              <a:defRPr sz="1800">
-                <a:solidFill>
-                  <a:srgbClr val="333333"/>
-                </a:solidFill>
-              </a:defRPr>
-            </a:pPr>
-            <a:r>
-              <a:t>🚀 Production: Gunicorn + Uvicorn workers</a:t>
-            </a:r>
-          </a:p>
-          <a:p>
-            <a:pPr>
-              <a:spcBef>
-                <a:spcPts val="800"/>
-              </a:spcBef>
-              <a:spcAft>
-                <a:spcPts val="800"/>
-              </a:spcAft>
-              <a:defRPr sz="1800">
-                <a:solidFill>
-                  <a:srgbClr val="333333"/>
-                </a:solidFill>
-              </a:defRPr>
-            </a:pPr>
-            <a:r>
-              <a:t>🚀 Database: SQLite (dev) → PostgreSQL (prod)</a:t>
-            </a:r>
-          </a:p>
-          <a:p>
-            <a:pPr>
-              <a:spcBef>
-                <a:spcPts val="800"/>
-              </a:spcBef>
-              <a:spcAft>
-                <a:spcPts val="800"/>
-              </a:spcAft>
-              <a:defRPr sz="1800">
-                <a:solidFill>
-                  <a:srgbClr val="333333"/>
-                </a:solidFill>
-              </a:defRPr>
-            </a:pPr>
-            <a:r>
-              <a:t>🚀 Hosting: Heroku, AWS, or Google Cloud</a:t>
-            </a:r>
-          </a:p>
-          <a:p>
-            <a:pPr>
-              <a:spcBef>
-                <a:spcPts val="800"/>
-              </a:spcBef>
-              <a:spcAft>
-                <a:spcPts val="800"/>
-              </a:spcAft>
-              <a:defRPr sz="1800">
-                <a:solidFill>
-                  <a:srgbClr val="333333"/>
-                </a:solidFill>
-              </a:defRPr>
-            </a:pPr>
-            <a:r>
-              <a:t>🚀 CI/CD: GitHub Actions</a:t>
+              <a:spcAft>
+                <a:spcPts val="800"/>
+              </a:spcAft>
+              <a:defRPr sz="2200">
+                <a:solidFill>
+                  <a:srgbClr val="2C3E50"/>
+                </a:solidFill>
+              </a:defRPr>
+            </a:pPr>
+            <a:r>
+              <a:t>Thank you — questions welcome!</a:t>
+            </a:r>
+          </a:p>
+          <a:p>
+            <a:pPr>
+              <a:spcAft>
+                <a:spcPts val="800"/>
+              </a:spcAft>
+              <a:defRPr sz="2200">
+                <a:solidFill>
+                  <a:srgbClr val="2C3E50"/>
+                </a:solidFill>
+              </a:defRPr>
+            </a:pPr>
+          </a:p>
+          <a:p>
+            <a:pPr>
+              <a:spcAft>
+                <a:spcPts val="800"/>
+              </a:spcAft>
+              <a:defRPr sz="2200">
+                <a:solidFill>
+                  <a:srgbClr val="2C3E50"/>
+                </a:solidFill>
+              </a:defRPr>
+            </a:pPr>
+            <a:r>
+              <a:t>Live demo:  https://comp3011-cw1-habit-api.onrender.com/docs</a:t>
+            </a:r>
+          </a:p>
+          <a:p>
+            <a:pPr>
+              <a:spcAft>
+                <a:spcPts val="800"/>
+              </a:spcAft>
+              <a:defRPr sz="2200">
+                <a:solidFill>
+                  <a:srgbClr val="2C3E50"/>
+                </a:solidFill>
+              </a:defRPr>
+            </a:pPr>
+            <a:r>
+              <a:t>Dashboard:  https://comp3011-cw1-habit-api.onrender.com/ui/</a:t>
+            </a:r>
+          </a:p>
+          <a:p>
+            <a:pPr>
+              <a:spcAft>
+                <a:spcPts val="800"/>
+              </a:spcAft>
+              <a:defRPr sz="2200">
+                <a:solidFill>
+                  <a:srgbClr val="2C3E50"/>
+                </a:solidFill>
+              </a:defRPr>
+            </a:pPr>
+            <a:r>
+              <a:t>GitHub:     github.com/NicolasIssa1/COMP3011-CW1-HABIT-API</a:t>
             </a:r>
           </a:p>
         </p:txBody>
@@ -3568,9 +4573,17 @@
 </p:sld>
 </file>
 
-<file path=ppt/slides/slide12.xml><?xml version="1.0" encoding="utf-8"?>
+<file path=ppt/slides/slide2.xml><?xml version="1.0" encoding="utf-8"?>
 <p:sld xmlns:a="http://schemas.openxmlformats.org/drawingml/2006/main" xmlns:p="http://schemas.openxmlformats.org/presentationml/2006/main" xmlns:r="http://schemas.openxmlformats.org/officeDocument/2006/relationships">
   <p:cSld>
+    <p:bg>
+      <p:bgPr>
+        <a:solidFill>
+          <a:srgbClr val="FFFFFF"/>
+        </a:solidFill>
+        <a:effectLst/>
+      </p:bgPr>
+    </p:bg>
     <p:spTree>
       <p:nvGrpSpPr>
         <p:cNvPr id="1" name=""/>
@@ -3587,18 +4600,16 @@
         <p:spPr>
           <a:xfrm>
             <a:off x="0" y="0"/>
-            <a:ext cx="9144000" cy="1097280"/>
+            <a:ext cx="12191695" cy="1188720"/>
           </a:xfrm>
           <a:prstGeom prst="rect">
             <a:avLst/>
           </a:prstGeom>
           <a:solidFill>
-            <a:srgbClr val="0066CC"/>
+            <a:srgbClr val="667EEA"/>
           </a:solidFill>
           <a:ln>
-            <a:solidFill>
-              <a:srgbClr val="0066CC"/>
-            </a:solidFill>
+            <a:noFill/>
           </a:ln>
         </p:spPr>
         <p:style>
@@ -3616,24 +4627,18 @@
           </a:fontRef>
         </p:style>
         <p:txBody>
-          <a:bodyPr rtlCol="0" anchor="ctr"/>
-          <a:lstStyle/>
-          <a:p>
-            <a:pPr algn="ctr">
-              <a:spcBef>
-                <a:spcPts val="1000"/>
-              </a:spcBef>
-              <a:spcAft>
-                <a:spcPts val="1000"/>
-              </a:spcAft>
-              <a:defRPr sz="4000" b="1">
+          <a:bodyPr rtlCol="0" anchor="ctr" wrap="square" lIns="731520" tIns="228600"/>
+          <a:lstStyle/>
+          <a:p>
+            <a:pPr algn="l">
+              <a:defRPr sz="3600" b="1">
                 <a:solidFill>
                   <a:srgbClr val="FFFFFF"/>
                 </a:solidFill>
               </a:defRPr>
             </a:pPr>
             <a:r>
-              <a:t>Future Enhancements</a:t>
+              <a:t>Architecture &amp; Tech Stack</a:t>
             </a:r>
           </a:p>
         </p:txBody>
@@ -3646,8 +4651,8 @@
         </p:nvSpPr>
         <p:spPr>
           <a:xfrm>
-            <a:off x="457200" y="1371600"/>
-            <a:ext cx="8229600" cy="5029200"/>
+            <a:off x="731520" y="1463040"/>
+            <a:ext cx="5029200" cy="4572000"/>
           </a:xfrm>
           <a:prstGeom prst="rect">
             <a:avLst/>
@@ -3661,92 +4666,175 @@
           <a:lstStyle/>
           <a:p>
             <a:pPr>
-              <a:spcBef>
-                <a:spcPts val="800"/>
-              </a:spcBef>
-              <a:spcAft>
-                <a:spcPts val="800"/>
-              </a:spcAft>
-              <a:defRPr sz="1800">
-                <a:solidFill>
-                  <a:srgbClr val="333333"/>
-                </a:solidFill>
-              </a:defRPr>
-            </a:pPr>
-            <a:r>
-              <a:t>v1.1 - JWT Authentication, Rate Limiting</a:t>
-            </a:r>
-          </a:p>
-          <a:p>
-            <a:pPr>
-              <a:spcBef>
-                <a:spcPts val="800"/>
-              </a:spcBef>
-              <a:spcAft>
-                <a:spcPts val="800"/>
-              </a:spcAft>
-              <a:defRPr sz="1800">
-                <a:solidFill>
-                  <a:srgbClr val="333333"/>
-                </a:solidFill>
-              </a:defRPr>
-            </a:pPr>
-            <a:r>
-              <a:t>v1.2 - User Accounts, Advanced Analytics</a:t>
-            </a:r>
-          </a:p>
-          <a:p>
-            <a:pPr>
-              <a:spcBef>
-                <a:spcPts val="800"/>
-              </a:spcBef>
-              <a:spcAft>
-                <a:spcPts val="800"/>
-              </a:spcAft>
-              <a:defRPr sz="1800">
-                <a:solidFill>
-                  <a:srgbClr val="333333"/>
-                </a:solidFill>
-              </a:defRPr>
-            </a:pPr>
-            <a:r>
-              <a:t>v1.3 - Redis Caching, Performance Optimization</a:t>
-            </a:r>
-          </a:p>
-          <a:p>
-            <a:pPr>
-              <a:spcBef>
-                <a:spcPts val="800"/>
-              </a:spcBef>
-              <a:spcAft>
-                <a:spcPts val="800"/>
-              </a:spcAft>
-              <a:defRPr sz="1800">
-                <a:solidFill>
-                  <a:srgbClr val="333333"/>
-                </a:solidFill>
-              </a:defRPr>
-            </a:pPr>
-            <a:r>
-              <a:t>v2.0 - Mobile App, Notifications</a:t>
-            </a:r>
-          </a:p>
-          <a:p>
-            <a:pPr>
-              <a:spcBef>
-                <a:spcPts val="800"/>
-              </a:spcBef>
-              <a:spcAft>
-                <a:spcPts val="800"/>
-              </a:spcAft>
-              <a:defRPr sz="1800">
-                <a:solidFill>
-                  <a:srgbClr val="333333"/>
-                </a:solidFill>
-              </a:defRPr>
-            </a:pPr>
-            <a:r>
-              <a:t>Roadmap: Quarterly releases</a:t>
+              <a:spcAft>
+                <a:spcPts val="800"/>
+              </a:spcAft>
+              <a:defRPr sz="1900">
+                <a:solidFill>
+                  <a:srgbClr val="2C3E50"/>
+                </a:solidFill>
+              </a:defRPr>
+            </a:pPr>
+            <a:r>
+              <a:t>Backend: FastAPI (Python 3.12)</a:t>
+            </a:r>
+          </a:p>
+          <a:p>
+            <a:pPr>
+              <a:spcAft>
+                <a:spcPts val="800"/>
+              </a:spcAft>
+              <a:defRPr sz="1900">
+                <a:solidFill>
+                  <a:srgbClr val="2C3E50"/>
+                </a:solidFill>
+              </a:defRPr>
+            </a:pPr>
+            <a:r>
+              <a:t>ORM: SQLAlchemy  ·  Migrations: Alembic</a:t>
+            </a:r>
+          </a:p>
+          <a:p>
+            <a:pPr>
+              <a:spcAft>
+                <a:spcPts val="800"/>
+              </a:spcAft>
+              <a:defRPr sz="1900">
+                <a:solidFill>
+                  <a:srgbClr val="2C3E50"/>
+                </a:solidFill>
+              </a:defRPr>
+            </a:pPr>
+            <a:r>
+              <a:t>Database: SQLite (dev)  ·  schema auto-created at startup</a:t>
+            </a:r>
+          </a:p>
+          <a:p>
+            <a:pPr>
+              <a:spcAft>
+                <a:spcPts val="800"/>
+              </a:spcAft>
+              <a:defRPr sz="1900">
+                <a:solidFill>
+                  <a:srgbClr val="2C3E50"/>
+                </a:solidFill>
+              </a:defRPr>
+            </a:pPr>
+            <a:r>
+              <a:t>Auth: X-API-Key header (401 missing / 403 invalid)</a:t>
+            </a:r>
+          </a:p>
+          <a:p>
+            <a:pPr>
+              <a:spcAft>
+                <a:spcPts val="800"/>
+              </a:spcAft>
+              <a:defRPr sz="1900">
+                <a:solidFill>
+                  <a:srgbClr val="2C3E50"/>
+                </a:solidFill>
+              </a:defRPr>
+            </a:pPr>
+            <a:r>
+              <a:t>Deployment: Render (free tier, auto‑deploy from main)</a:t>
+            </a:r>
+          </a:p>
+        </p:txBody>
+      </p:sp>
+      <p:sp>
+        <p:nvSpPr>
+          <p:cNvPr id="4" name="TextBox 3"/>
+          <p:cNvSpPr txBox="1"/>
+          <p:nvPr/>
+        </p:nvSpPr>
+        <p:spPr>
+          <a:xfrm>
+            <a:off x="6217920" y="1463040"/>
+            <a:ext cx="5029200" cy="4572000"/>
+          </a:xfrm>
+          <a:prstGeom prst="rect">
+            <a:avLst/>
+          </a:prstGeom>
+          <a:noFill/>
+        </p:spPr>
+        <p:txBody>
+          <a:bodyPr wrap="square">
+            <a:spAutoFit/>
+          </a:bodyPr>
+          <a:lstStyle/>
+          <a:p>
+            <a:pPr>
+              <a:spcAft>
+                <a:spcPts val="800"/>
+              </a:spcAft>
+              <a:defRPr sz="1900">
+                <a:solidFill>
+                  <a:srgbClr val="2C3E50"/>
+                </a:solidFill>
+              </a:defRPr>
+            </a:pPr>
+            <a:r>
+              <a:t>Frontend: Vanilla HTML / CSS / JS at /ui/</a:t>
+            </a:r>
+          </a:p>
+          <a:p>
+            <a:pPr>
+              <a:spcAft>
+                <a:spcPts val="800"/>
+              </a:spcAft>
+              <a:defRPr sz="1900">
+                <a:solidFill>
+                  <a:srgbClr val="2C3E50"/>
+                </a:solidFill>
+              </a:defRPr>
+            </a:pPr>
+            <a:r>
+              <a:t>API docs: Swagger UI auto-generated at /docs</a:t>
+            </a:r>
+          </a:p>
+          <a:p>
+            <a:pPr>
+              <a:spcAft>
+                <a:spcPts val="800"/>
+              </a:spcAft>
+              <a:defRPr sz="1900">
+                <a:solidFill>
+                  <a:srgbClr val="2C3E50"/>
+                </a:solidFill>
+              </a:defRPr>
+            </a:pPr>
+            <a:r>
+              <a:t>Testing: pytest (14 tests, 3 files)</a:t>
+            </a:r>
+          </a:p>
+          <a:p>
+            <a:pPr>
+              <a:spcAft>
+                <a:spcPts val="800"/>
+              </a:spcAft>
+              <a:defRPr sz="1900">
+                <a:solidFill>
+                  <a:srgbClr val="2C3E50"/>
+                </a:solidFill>
+              </a:defRPr>
+            </a:pPr>
+            <a:r>
+              <a:t>Version control: Git + GitHub (49 commits)</a:t>
+            </a:r>
+          </a:p>
+          <a:p>
+            <a:pPr>
+              <a:spcAft>
+                <a:spcPts val="800"/>
+              </a:spcAft>
+              <a:defRPr sz="1900">
+                <a:solidFill>
+                  <a:srgbClr val="2C3E50"/>
+                </a:solidFill>
+              </a:defRPr>
+            </a:pPr>
+            <a:r>
+              <a:t>[Screenshot placeholder: architecture diagram]</a:t>
             </a:r>
           </a:p>
         </p:txBody>
@@ -3759,9 +4847,17 @@
 </p:sld>
 </file>
 
-<file path=ppt/slides/slide13.xml><?xml version="1.0" encoding="utf-8"?>
+<file path=ppt/slides/slide3.xml><?xml version="1.0" encoding="utf-8"?>
 <p:sld xmlns:a="http://schemas.openxmlformats.org/drawingml/2006/main" xmlns:p="http://schemas.openxmlformats.org/presentationml/2006/main" xmlns:r="http://schemas.openxmlformats.org/officeDocument/2006/relationships">
   <p:cSld>
+    <p:bg>
+      <p:bgPr>
+        <a:solidFill>
+          <a:srgbClr val="FFFFFF"/>
+        </a:solidFill>
+        <a:effectLst/>
+      </p:bgPr>
+    </p:bg>
     <p:spTree>
       <p:nvGrpSpPr>
         <p:cNvPr id="1" name=""/>
@@ -3778,18 +4874,16 @@
         <p:spPr>
           <a:xfrm>
             <a:off x="0" y="0"/>
-            <a:ext cx="9144000" cy="1097280"/>
+            <a:ext cx="12191695" cy="1188720"/>
           </a:xfrm>
           <a:prstGeom prst="rect">
             <a:avLst/>
           </a:prstGeom>
           <a:solidFill>
-            <a:srgbClr val="0066CC"/>
+            <a:srgbClr val="667EEA"/>
           </a:solidFill>
           <a:ln>
-            <a:solidFill>
-              <a:srgbClr val="0066CC"/>
-            </a:solidFill>
+            <a:noFill/>
           </a:ln>
         </p:spPr>
         <p:style>
@@ -3807,24 +4901,18 @@
           </a:fontRef>
         </p:style>
         <p:txBody>
-          <a:bodyPr rtlCol="0" anchor="ctr"/>
-          <a:lstStyle/>
-          <a:p>
-            <a:pPr algn="ctr">
-              <a:spcBef>
-                <a:spcPts val="1000"/>
-              </a:spcBef>
-              <a:spcAft>
-                <a:spcPts val="1000"/>
-              </a:spcAft>
-              <a:defRPr sz="4000" b="1">
+          <a:bodyPr rtlCol="0" anchor="ctr" wrap="square" lIns="731520" tIns="228600"/>
+          <a:lstStyle/>
+          <a:p>
+            <a:pPr algn="l">
+              <a:defRPr sz="3600" b="1">
                 <a:solidFill>
                   <a:srgbClr val="FFFFFF"/>
                 </a:solidFill>
               </a:defRPr>
             </a:pPr>
             <a:r>
-              <a:t>Summary</a:t>
+              <a:t>Data Model &amp; Design Decisions</a:t>
             </a:r>
           </a:p>
         </p:txBody>
@@ -3837,8 +4925,8 @@
         </p:nvSpPr>
         <p:spPr>
           <a:xfrm>
-            <a:off x="457200" y="1371600"/>
-            <a:ext cx="8229600" cy="5029200"/>
+            <a:off x="731520" y="1463040"/>
+            <a:ext cx="5029200" cy="4572000"/>
           </a:xfrm>
           <a:prstGeom prst="rect">
             <a:avLst/>
@@ -3852,92 +4940,190 @@
           <a:lstStyle/>
           <a:p>
             <a:pPr>
-              <a:spcBef>
-                <a:spcPts val="800"/>
-              </a:spcBef>
-              <a:spcAft>
-                <a:spcPts val="800"/>
-              </a:spcAft>
-              <a:defRPr sz="1800">
-                <a:solidFill>
-                  <a:srgbClr val="333333"/>
-                </a:solidFill>
-              </a:defRPr>
-            </a:pPr>
-            <a:r>
-              <a:t>✅ Complete API implementation</a:t>
-            </a:r>
-          </a:p>
-          <a:p>
-            <a:pPr>
-              <a:spcBef>
-                <a:spcPts val="800"/>
-              </a:spcBef>
-              <a:spcAft>
-                <a:spcPts val="800"/>
-              </a:spcAft>
-              <a:defRPr sz="1800">
-                <a:solidFill>
-                  <a:srgbClr val="333333"/>
-                </a:solidFill>
-              </a:defRPr>
-            </a:pPr>
-            <a:r>
-              <a:t>✅ Comprehensive testing (100% pass)</a:t>
-            </a:r>
-          </a:p>
-          <a:p>
-            <a:pPr>
-              <a:spcBef>
-                <a:spcPts val="800"/>
-              </a:spcBef>
-              <a:spcAft>
-                <a:spcPts val="800"/>
-              </a:spcAft>
-              <a:defRPr sz="1800">
-                <a:solidFill>
-                  <a:srgbClr val="333333"/>
-                </a:solidFill>
-              </a:defRPr>
-            </a:pPr>
-            <a:r>
-              <a:t>✅ Production-ready architecture</a:t>
-            </a:r>
-          </a:p>
-          <a:p>
-            <a:pPr>
-              <a:spcBef>
-                <a:spcPts val="800"/>
-              </a:spcBef>
-              <a:spcAft>
-                <a:spcPts val="800"/>
-              </a:spcAft>
-              <a:defRPr sz="1800">
-                <a:solidFill>
-                  <a:srgbClr val="333333"/>
-                </a:solidFill>
-              </a:defRPr>
-            </a:pPr>
-            <a:r>
-              <a:t>✅ Excellent documentation</a:t>
-            </a:r>
-          </a:p>
-          <a:p>
-            <a:pPr>
-              <a:spcBef>
-                <a:spcPts val="800"/>
-              </a:spcBef>
-              <a:spcAft>
-                <a:spcPts val="800"/>
-              </a:spcAft>
-              <a:defRPr sz="1800">
-                <a:solidFill>
-                  <a:srgbClr val="333333"/>
-                </a:solidFill>
-              </a:defRPr>
-            </a:pPr>
-            <a:r>
-              <a:t>✅ Clear roadmap for enhancements</a:t>
+              <a:spcAft>
+                <a:spcPts val="800"/>
+              </a:spcAft>
+              <a:defRPr sz="1900">
+                <a:solidFill>
+                  <a:srgbClr val="2C3E50"/>
+                </a:solidFill>
+              </a:defRPr>
+            </a:pPr>
+            <a:r>
+              <a:t>Two tables: Habit  ↔  HabitLog (1-to-many)</a:t>
+            </a:r>
+          </a:p>
+          <a:p>
+            <a:pPr>
+              <a:spcAft>
+                <a:spcPts val="800"/>
+              </a:spcAft>
+              <a:defRPr sz="1900">
+                <a:solidFill>
+                  <a:srgbClr val="2C3E50"/>
+                </a:solidFill>
+              </a:defRPr>
+            </a:pPr>
+            <a:r>
+              <a:t>Habit: id, name, description, frequency, is_active, created_at</a:t>
+            </a:r>
+          </a:p>
+          <a:p>
+            <a:pPr>
+              <a:spcAft>
+                <a:spcPts val="800"/>
+              </a:spcAft>
+              <a:defRPr sz="1900">
+                <a:solidFill>
+                  <a:srgbClr val="2C3E50"/>
+                </a:solidFill>
+              </a:defRPr>
+            </a:pPr>
+            <a:r>
+              <a:t>HabitLog: id, habit_id (FK), date, notes, created_at</a:t>
+            </a:r>
+          </a:p>
+          <a:p>
+            <a:pPr>
+              <a:spcAft>
+                <a:spcPts val="800"/>
+              </a:spcAft>
+              <a:defRPr sz="1900">
+                <a:solidFill>
+                  <a:srgbClr val="2C3E50"/>
+                </a:solidFill>
+              </a:defRPr>
+            </a:pPr>
+            <a:r>
+              <a:t>Unique constraint: (habit_id, date) → prevents duplicate logs</a:t>
+            </a:r>
+          </a:p>
+          <a:p>
+            <a:pPr>
+              <a:spcAft>
+                <a:spcPts val="800"/>
+              </a:spcAft>
+              <a:defRPr sz="1900">
+                <a:solidFill>
+                  <a:srgbClr val="2C3E50"/>
+                </a:solidFill>
+              </a:defRPr>
+            </a:pPr>
+            <a:r>
+              <a:t>Done-only logging: a log exists only when a habit is completed</a:t>
+            </a:r>
+          </a:p>
+        </p:txBody>
+      </p:sp>
+      <p:sp>
+        <p:nvSpPr>
+          <p:cNvPr id="4" name="TextBox 3"/>
+          <p:cNvSpPr txBox="1"/>
+          <p:nvPr/>
+        </p:nvSpPr>
+        <p:spPr>
+          <a:xfrm>
+            <a:off x="6217920" y="1463040"/>
+            <a:ext cx="5029200" cy="4572000"/>
+          </a:xfrm>
+          <a:prstGeom prst="rect">
+            <a:avLst/>
+          </a:prstGeom>
+          <a:noFill/>
+        </p:spPr>
+        <p:txBody>
+          <a:bodyPr wrap="square">
+            <a:spAutoFit/>
+          </a:bodyPr>
+          <a:lstStyle/>
+          <a:p>
+            <a:pPr>
+              <a:spcAft>
+                <a:spcPts val="800"/>
+              </a:spcAft>
+              <a:defRPr sz="1900">
+                <a:solidFill>
+                  <a:srgbClr val="2C3E50"/>
+                </a:solidFill>
+              </a:defRPr>
+            </a:pPr>
+            <a:r>
+              <a:t>Design rationale:</a:t>
+            </a:r>
+          </a:p>
+          <a:p>
+            <a:pPr>
+              <a:spcAft>
+                <a:spcPts val="800"/>
+              </a:spcAft>
+              <a:defRPr sz="1900">
+                <a:solidFill>
+                  <a:srgbClr val="2C3E50"/>
+                </a:solidFill>
+              </a:defRPr>
+            </a:pPr>
+            <a:r>
+              <a:t>  • Normalised schema keeps analytics queries simple</a:t>
+            </a:r>
+          </a:p>
+          <a:p>
+            <a:pPr>
+              <a:spcAft>
+                <a:spcPts val="800"/>
+              </a:spcAft>
+              <a:defRPr sz="1900">
+                <a:solidFill>
+                  <a:srgbClr val="2C3E50"/>
+                </a:solidFill>
+              </a:defRPr>
+            </a:pPr>
+            <a:r>
+              <a:t>  • Missing dates = not completed (no 'skipped' state needed)</a:t>
+            </a:r>
+          </a:p>
+          <a:p>
+            <a:pPr>
+              <a:spcAft>
+                <a:spcPts val="800"/>
+              </a:spcAft>
+              <a:defRPr sz="1900">
+                <a:solidFill>
+                  <a:srgbClr val="2C3E50"/>
+                </a:solidFill>
+              </a:defRPr>
+            </a:pPr>
+            <a:r>
+              <a:t>  • Uniqueness constraint enforced at DB level → 409 Conflict</a:t>
+            </a:r>
+          </a:p>
+          <a:p>
+            <a:pPr>
+              <a:spcAft>
+                <a:spcPts val="800"/>
+              </a:spcAft>
+              <a:defRPr sz="1900">
+                <a:solidFill>
+                  <a:srgbClr val="2C3E50"/>
+                </a:solidFill>
+              </a:defRPr>
+            </a:pPr>
+            <a:r>
+              <a:t>  • is_active soft-delete flag on habits</a:t>
+            </a:r>
+          </a:p>
+          <a:p>
+            <a:pPr>
+              <a:spcAft>
+                <a:spcPts val="800"/>
+              </a:spcAft>
+              <a:defRPr sz="1900">
+                <a:solidFill>
+                  <a:srgbClr val="2C3E50"/>
+                </a:solidFill>
+              </a:defRPr>
+            </a:pPr>
+            <a:r>
+              <a:t>  • Cascade considerations for habit deletion</a:t>
             </a:r>
           </a:p>
         </p:txBody>
@@ -3950,9 +5136,17 @@
 </p:sld>
 </file>
 
-<file path=ppt/slides/slide2.xml><?xml version="1.0" encoding="utf-8"?>
+<file path=ppt/slides/slide4.xml><?xml version="1.0" encoding="utf-8"?>
 <p:sld xmlns:a="http://schemas.openxmlformats.org/drawingml/2006/main" xmlns:p="http://schemas.openxmlformats.org/presentationml/2006/main" xmlns:r="http://schemas.openxmlformats.org/officeDocument/2006/relationships">
   <p:cSld>
+    <p:bg>
+      <p:bgPr>
+        <a:solidFill>
+          <a:srgbClr val="FFFFFF"/>
+        </a:solidFill>
+        <a:effectLst/>
+      </p:bgPr>
+    </p:bg>
     <p:spTree>
       <p:nvGrpSpPr>
         <p:cNvPr id="1" name=""/>
@@ -3969,18 +5163,16 @@
         <p:spPr>
           <a:xfrm>
             <a:off x="0" y="0"/>
-            <a:ext cx="9144000" cy="1097280"/>
+            <a:ext cx="12191695" cy="1188720"/>
           </a:xfrm>
           <a:prstGeom prst="rect">
             <a:avLst/>
           </a:prstGeom>
           <a:solidFill>
-            <a:srgbClr val="0066CC"/>
+            <a:srgbClr val="667EEA"/>
           </a:solidFill>
           <a:ln>
-            <a:solidFill>
-              <a:srgbClr val="0066CC"/>
-            </a:solidFill>
+            <a:noFill/>
           </a:ln>
         </p:spPr>
         <p:style>
@@ -3998,24 +5190,18 @@
           </a:fontRef>
         </p:style>
         <p:txBody>
-          <a:bodyPr rtlCol="0" anchor="ctr"/>
-          <a:lstStyle/>
-          <a:p>
-            <a:pPr algn="ctr">
-              <a:spcBef>
-                <a:spcPts val="1000"/>
-              </a:spcBef>
-              <a:spcAft>
-                <a:spcPts val="1000"/>
-              </a:spcAft>
-              <a:defRPr sz="4000" b="1">
+          <a:bodyPr rtlCol="0" anchor="ctr" wrap="square" lIns="731520" tIns="228600"/>
+          <a:lstStyle/>
+          <a:p>
+            <a:pPr algn="l">
+              <a:defRPr sz="3600" b="1">
                 <a:solidFill>
                   <a:srgbClr val="FFFFFF"/>
                 </a:solidFill>
               </a:defRPr>
             </a:pPr>
             <a:r>
-              <a:t>Project Overview</a:t>
+              <a:t>API Endpoints &amp; Features</a:t>
             </a:r>
           </a:p>
         </p:txBody>
@@ -4028,8 +5214,8 @@
         </p:nvSpPr>
         <p:spPr>
           <a:xfrm>
-            <a:off x="457200" y="1371600"/>
-            <a:ext cx="8229600" cy="5029200"/>
+            <a:off x="731520" y="1463040"/>
+            <a:ext cx="5029200" cy="4572000"/>
           </a:xfrm>
           <a:prstGeom prst="rect">
             <a:avLst/>
@@ -4043,92 +5229,361 @@
           <a:lstStyle/>
           <a:p>
             <a:pPr>
-              <a:spcBef>
-                <a:spcPts val="800"/>
-              </a:spcBef>
-              <a:spcAft>
-                <a:spcPts val="800"/>
-              </a:spcAft>
-              <a:defRPr sz="1800">
-                <a:solidFill>
-                  <a:srgbClr val="333333"/>
-                </a:solidFill>
-              </a:defRPr>
-            </a:pPr>
-            <a:r>
-              <a:t>✓ RESTful API for tracking daily habits</a:t>
-            </a:r>
-          </a:p>
-          <a:p>
-            <a:pPr>
-              <a:spcBef>
-                <a:spcPts val="800"/>
-              </a:spcBef>
-              <a:spcAft>
-                <a:spcPts val="800"/>
-              </a:spcAft>
-              <a:defRPr sz="1800">
-                <a:solidFill>
-                  <a:srgbClr val="333333"/>
-                </a:solidFill>
-              </a:defRPr>
-            </a:pPr>
-            <a:r>
-              <a:t>✓ Log completions and view analytics</a:t>
-            </a:r>
-          </a:p>
-          <a:p>
-            <a:pPr>
-              <a:spcBef>
-                <a:spcPts val="800"/>
-              </a:spcBef>
-              <a:spcAft>
-                <a:spcPts val="800"/>
-              </a:spcAft>
-              <a:defRPr sz="1800">
-                <a:solidFill>
-                  <a:srgbClr val="333333"/>
-                </a:solidFill>
-              </a:defRPr>
-            </a:pPr>
-            <a:r>
-              <a:t>✓ Streak tracking and weekly summaries</a:t>
-            </a:r>
-          </a:p>
-          <a:p>
-            <a:pPr>
-              <a:spcBef>
-                <a:spcPts val="800"/>
-              </a:spcBef>
-              <a:spcAft>
-                <a:spcPts val="800"/>
-              </a:spcAft>
-              <a:defRPr sz="1800">
-                <a:solidFill>
-                  <a:srgbClr val="333333"/>
-                </a:solidFill>
-              </a:defRPr>
-            </a:pPr>
-            <a:r>
-              <a:t>✓ 100% test coverage (10/10 tests passing)</a:t>
-            </a:r>
-          </a:p>
-          <a:p>
-            <a:pPr>
-              <a:spcBef>
-                <a:spcPts val="800"/>
-              </a:spcBef>
-              <a:spcAft>
-                <a:spcPts val="800"/>
-              </a:spcAft>
-              <a:defRPr sz="1800">
-                <a:solidFill>
-                  <a:srgbClr val="333333"/>
-                </a:solidFill>
-              </a:defRPr>
-            </a:pPr>
-            <a:r>
-              <a:t>✓ Production-ready with comprehensive documentation</a:t>
+              <a:spcAft>
+                <a:spcPts val="800"/>
+              </a:spcAft>
+              <a:defRPr sz="1900">
+                <a:solidFill>
+                  <a:srgbClr val="2C3E50"/>
+                </a:solidFill>
+              </a:defRPr>
+            </a:pPr>
+            <a:r>
+              <a:t>Habits CRUD:</a:t>
+            </a:r>
+          </a:p>
+          <a:p>
+            <a:pPr>
+              <a:spcAft>
+                <a:spcPts val="800"/>
+              </a:spcAft>
+              <a:defRPr sz="1900">
+                <a:solidFill>
+                  <a:srgbClr val="2C3E50"/>
+                </a:solidFill>
+              </a:defRPr>
+            </a:pPr>
+            <a:r>
+              <a:t>  POST   /api/habits             → 201 Created</a:t>
+            </a:r>
+          </a:p>
+          <a:p>
+            <a:pPr>
+              <a:spcAft>
+                <a:spcPts val="800"/>
+              </a:spcAft>
+              <a:defRPr sz="1900">
+                <a:solidFill>
+                  <a:srgbClr val="2C3E50"/>
+                </a:solidFill>
+              </a:defRPr>
+            </a:pPr>
+            <a:r>
+              <a:t>  GET    /api/habits             → 200 (paginated, filterable)</a:t>
+            </a:r>
+          </a:p>
+          <a:p>
+            <a:pPr>
+              <a:spcAft>
+                <a:spcPts val="800"/>
+              </a:spcAft>
+              <a:defRPr sz="1900">
+                <a:solidFill>
+                  <a:srgbClr val="2C3E50"/>
+                </a:solidFill>
+              </a:defRPr>
+            </a:pPr>
+            <a:r>
+              <a:t>  GET    /api/habits/{id}        → 200 / 404</a:t>
+            </a:r>
+          </a:p>
+          <a:p>
+            <a:pPr>
+              <a:spcAft>
+                <a:spcPts val="800"/>
+              </a:spcAft>
+              <a:defRPr sz="1900">
+                <a:solidFill>
+                  <a:srgbClr val="2C3E50"/>
+                </a:solidFill>
+              </a:defRPr>
+            </a:pPr>
+            <a:r>
+              <a:t>  PATCH  /api/habits/{id}        → 200 / 404</a:t>
+            </a:r>
+          </a:p>
+          <a:p>
+            <a:pPr>
+              <a:spcAft>
+                <a:spcPts val="800"/>
+              </a:spcAft>
+              <a:defRPr sz="1900">
+                <a:solidFill>
+                  <a:srgbClr val="2C3E50"/>
+                </a:solidFill>
+              </a:defRPr>
+            </a:pPr>
+            <a:r>
+              <a:t>  DELETE /api/habits/{id}        → 204 / 404</a:t>
+            </a:r>
+          </a:p>
+          <a:p>
+            <a:pPr>
+              <a:spcAft>
+                <a:spcPts val="800"/>
+              </a:spcAft>
+              <a:defRPr sz="1900">
+                <a:solidFill>
+                  <a:srgbClr val="2C3E50"/>
+                </a:solidFill>
+              </a:defRPr>
+            </a:pPr>
+          </a:p>
+          <a:p>
+            <a:pPr>
+              <a:spcAft>
+                <a:spcPts val="800"/>
+              </a:spcAft>
+              <a:defRPr sz="1900">
+                <a:solidFill>
+                  <a:srgbClr val="2C3E50"/>
+                </a:solidFill>
+              </a:defRPr>
+            </a:pPr>
+            <a:r>
+              <a:t>Logs:</a:t>
+            </a:r>
+          </a:p>
+          <a:p>
+            <a:pPr>
+              <a:spcAft>
+                <a:spcPts val="800"/>
+              </a:spcAft>
+              <a:defRPr sz="1900">
+                <a:solidFill>
+                  <a:srgbClr val="2C3E50"/>
+                </a:solidFill>
+              </a:defRPr>
+            </a:pPr>
+            <a:r>
+              <a:t>  POST   /api/habits/{id}/logs   → 201 / 409 duplicate</a:t>
+            </a:r>
+          </a:p>
+          <a:p>
+            <a:pPr>
+              <a:spcAft>
+                <a:spcPts val="800"/>
+              </a:spcAft>
+              <a:defRPr sz="1900">
+                <a:solidFill>
+                  <a:srgbClr val="2C3E50"/>
+                </a:solidFill>
+              </a:defRPr>
+            </a:pPr>
+            <a:r>
+              <a:t>  GET    /api/habits/{id}/logs   → 200 (date-filterable)</a:t>
+            </a:r>
+          </a:p>
+          <a:p>
+            <a:pPr>
+              <a:spcAft>
+                <a:spcPts val="800"/>
+              </a:spcAft>
+              <a:defRPr sz="1900">
+                <a:solidFill>
+                  <a:srgbClr val="2C3E50"/>
+                </a:solidFill>
+              </a:defRPr>
+            </a:pPr>
+            <a:r>
+              <a:t>  DELETE /api/habits/{id}/logs/{log_id} → 204 / 404</a:t>
+            </a:r>
+          </a:p>
+        </p:txBody>
+      </p:sp>
+      <p:sp>
+        <p:nvSpPr>
+          <p:cNvPr id="4" name="TextBox 3"/>
+          <p:cNvSpPr txBox="1"/>
+          <p:nvPr/>
+        </p:nvSpPr>
+        <p:spPr>
+          <a:xfrm>
+            <a:off x="6217920" y="1463040"/>
+            <a:ext cx="5029200" cy="4572000"/>
+          </a:xfrm>
+          <a:prstGeom prst="rect">
+            <a:avLst/>
+          </a:prstGeom>
+          <a:noFill/>
+        </p:spPr>
+        <p:txBody>
+          <a:bodyPr wrap="square">
+            <a:spAutoFit/>
+          </a:bodyPr>
+          <a:lstStyle/>
+          <a:p>
+            <a:pPr>
+              <a:spcAft>
+                <a:spcPts val="800"/>
+              </a:spcAft>
+              <a:defRPr sz="1900">
+                <a:solidFill>
+                  <a:srgbClr val="2C3E50"/>
+                </a:solidFill>
+              </a:defRPr>
+            </a:pPr>
+            <a:r>
+              <a:t>Analytics:</a:t>
+            </a:r>
+          </a:p>
+          <a:p>
+            <a:pPr>
+              <a:spcAft>
+                <a:spcPts val="800"/>
+              </a:spcAft>
+              <a:defRPr sz="1900">
+                <a:solidFill>
+                  <a:srgbClr val="2C3E50"/>
+                </a:solidFill>
+              </a:defRPr>
+            </a:pPr>
+            <a:r>
+              <a:t>  GET /api/habits/{id}/streak</a:t>
+            </a:r>
+          </a:p>
+          <a:p>
+            <a:pPr>
+              <a:spcAft>
+                <a:spcPts val="800"/>
+              </a:spcAft>
+              <a:defRPr sz="1900">
+                <a:solidFill>
+                  <a:srgbClr val="2C3E50"/>
+                </a:solidFill>
+              </a:defRPr>
+            </a:pPr>
+            <a:r>
+              <a:t>    → current_streak, longest_streak, total_completions</a:t>
+            </a:r>
+          </a:p>
+          <a:p>
+            <a:pPr>
+              <a:spcAft>
+                <a:spcPts val="800"/>
+              </a:spcAft>
+              <a:defRPr sz="1900">
+                <a:solidFill>
+                  <a:srgbClr val="2C3E50"/>
+                </a:solidFill>
+              </a:defRPr>
+            </a:pPr>
+          </a:p>
+          <a:p>
+            <a:pPr>
+              <a:spcAft>
+                <a:spcPts val="800"/>
+              </a:spcAft>
+              <a:defRPr sz="1900">
+                <a:solidFill>
+                  <a:srgbClr val="2C3E50"/>
+                </a:solidFill>
+              </a:defRPr>
+            </a:pPr>
+            <a:r>
+              <a:t>  GET /api/analytics/weekly-summary?week=YYYY-WW</a:t>
+            </a:r>
+          </a:p>
+          <a:p>
+            <a:pPr>
+              <a:spcAft>
+                <a:spcPts val="800"/>
+              </a:spcAft>
+              <a:defRPr sz="1900">
+                <a:solidFill>
+                  <a:srgbClr val="2C3E50"/>
+                </a:solidFill>
+              </a:defRPr>
+            </a:pPr>
+            <a:r>
+              <a:t>    → per-habit completions for an ISO week</a:t>
+            </a:r>
+          </a:p>
+          <a:p>
+            <a:pPr>
+              <a:spcAft>
+                <a:spcPts val="800"/>
+              </a:spcAft>
+              <a:defRPr sz="1900">
+                <a:solidFill>
+                  <a:srgbClr val="2C3E50"/>
+                </a:solidFill>
+              </a:defRPr>
+            </a:pPr>
+            <a:r>
+              <a:t>    → accepts 2026-09 or 2026-W09</a:t>
+            </a:r>
+          </a:p>
+          <a:p>
+            <a:pPr>
+              <a:spcAft>
+                <a:spcPts val="800"/>
+              </a:spcAft>
+              <a:defRPr sz="1900">
+                <a:solidFill>
+                  <a:srgbClr val="2C3E50"/>
+                </a:solidFill>
+              </a:defRPr>
+            </a:pPr>
+          </a:p>
+          <a:p>
+            <a:pPr>
+              <a:spcAft>
+                <a:spcPts val="800"/>
+              </a:spcAft>
+              <a:defRPr sz="1900">
+                <a:solidFill>
+                  <a:srgbClr val="2C3E50"/>
+                </a:solidFill>
+              </a:defRPr>
+            </a:pPr>
+            <a:r>
+              <a:t>Other:</a:t>
+            </a:r>
+          </a:p>
+          <a:p>
+            <a:pPr>
+              <a:spcAft>
+                <a:spcPts val="800"/>
+              </a:spcAft>
+              <a:defRPr sz="1900">
+                <a:solidFill>
+                  <a:srgbClr val="2C3E50"/>
+                </a:solidFill>
+              </a:defRPr>
+            </a:pPr>
+            <a:r>
+              <a:t>  GET /health         → public health check</a:t>
+            </a:r>
+          </a:p>
+          <a:p>
+            <a:pPr>
+              <a:spcAft>
+                <a:spcPts val="800"/>
+              </a:spcAft>
+              <a:defRPr sz="1900">
+                <a:solidFill>
+                  <a:srgbClr val="2C3E50"/>
+                </a:solidFill>
+              </a:defRPr>
+            </a:pPr>
+            <a:r>
+              <a:t>  GET /docs           → Swagger UI</a:t>
+            </a:r>
+          </a:p>
+          <a:p>
+            <a:pPr>
+              <a:spcAft>
+                <a:spcPts val="800"/>
+              </a:spcAft>
+              <a:defRPr sz="1900">
+                <a:solidFill>
+                  <a:srgbClr val="2C3E50"/>
+                </a:solidFill>
+              </a:defRPr>
+            </a:pPr>
+            <a:r>
+              <a:t>  GET /ui/            → web dashboard</a:t>
             </a:r>
           </a:p>
         </p:txBody>
@@ -4141,9 +5596,17 @@
 </p:sld>
 </file>
 
-<file path=ppt/slides/slide3.xml><?xml version="1.0" encoding="utf-8"?>
+<file path=ppt/slides/slide5.xml><?xml version="1.0" encoding="utf-8"?>
 <p:sld xmlns:a="http://schemas.openxmlformats.org/drawingml/2006/main" xmlns:p="http://schemas.openxmlformats.org/presentationml/2006/main" xmlns:r="http://schemas.openxmlformats.org/officeDocument/2006/relationships">
   <p:cSld>
+    <p:bg>
+      <p:bgPr>
+        <a:solidFill>
+          <a:srgbClr val="FFFFFF"/>
+        </a:solidFill>
+        <a:effectLst/>
+      </p:bgPr>
+    </p:bg>
     <p:spTree>
       <p:nvGrpSpPr>
         <p:cNvPr id="1" name=""/>
@@ -4160,18 +5623,16 @@
         <p:spPr>
           <a:xfrm>
             <a:off x="0" y="0"/>
-            <a:ext cx="9144000" cy="1097280"/>
+            <a:ext cx="12191695" cy="1188720"/>
           </a:xfrm>
           <a:prstGeom prst="rect">
             <a:avLst/>
           </a:prstGeom>
           <a:solidFill>
-            <a:srgbClr val="0066CC"/>
+            <a:srgbClr val="667EEA"/>
           </a:solidFill>
           <a:ln>
-            <a:solidFill>
-              <a:srgbClr val="0066CC"/>
-            </a:solidFill>
+            <a:noFill/>
           </a:ln>
         </p:spPr>
         <p:style>
@@ -4189,24 +5650,18 @@
           </a:fontRef>
         </p:style>
         <p:txBody>
-          <a:bodyPr rtlCol="0" anchor="ctr"/>
-          <a:lstStyle/>
-          <a:p>
-            <a:pPr algn="ctr">
-              <a:spcBef>
-                <a:spcPts val="1000"/>
-              </a:spcBef>
-              <a:spcAft>
-                <a:spcPts val="1000"/>
-              </a:spcAft>
-              <a:defRPr sz="4000" b="1">
+          <a:bodyPr rtlCol="0" anchor="ctr" wrap="square" lIns="731520" tIns="228600"/>
+          <a:lstStyle/>
+          <a:p>
+            <a:pPr algn="l">
+              <a:defRPr sz="3600" b="1">
                 <a:solidFill>
                   <a:srgbClr val="FFFFFF"/>
                 </a:solidFill>
               </a:defRPr>
             </a:pPr>
             <a:r>
-              <a:t>Technology Stack</a:t>
+              <a:t>Error Handling &amp; HTTP Status Codes</a:t>
             </a:r>
           </a:p>
         </p:txBody>
@@ -4219,8 +5674,8 @@
         </p:nvSpPr>
         <p:spPr>
           <a:xfrm>
-            <a:off x="457200" y="1371600"/>
-            <a:ext cx="8229600" cy="5029200"/>
+            <a:off x="731520" y="1463040"/>
+            <a:ext cx="10515600" cy="4572000"/>
           </a:xfrm>
           <a:prstGeom prst="rect">
             <a:avLst/>
@@ -4234,92 +5689,152 @@
           <a:lstStyle/>
           <a:p>
             <a:pPr>
-              <a:spcBef>
-                <a:spcPts val="800"/>
-              </a:spcBef>
-              <a:spcAft>
-                <a:spcPts val="800"/>
-              </a:spcAft>
-              <a:defRPr sz="1800">
-                <a:solidFill>
-                  <a:srgbClr val="333333"/>
-                </a:solidFill>
-              </a:defRPr>
-            </a:pPr>
-            <a:r>
-              <a:t>🔧 FastAPI 0.129.1 - Async web framework</a:t>
-            </a:r>
-          </a:p>
-          <a:p>
-            <a:pPr>
-              <a:spcBef>
-                <a:spcPts val="800"/>
-              </a:spcBef>
-              <a:spcAft>
-                <a:spcPts val="800"/>
-              </a:spcAft>
-              <a:defRPr sz="1800">
-                <a:solidFill>
-                  <a:srgbClr val="333333"/>
-                </a:solidFill>
-              </a:defRPr>
-            </a:pPr>
-            <a:r>
-              <a:t>🗄️  SQLAlchemy 2.0.46 - ORM</a:t>
-            </a:r>
-          </a:p>
-          <a:p>
-            <a:pPr>
-              <a:spcBef>
-                <a:spcPts val="800"/>
-              </a:spcBef>
-              <a:spcAft>
-                <a:spcPts val="800"/>
-              </a:spcAft>
-              <a:defRPr sz="1800">
-                <a:solidFill>
-                  <a:srgbClr val="333333"/>
-                </a:solidFill>
-              </a:defRPr>
-            </a:pPr>
-            <a:r>
-              <a:t>✔️  Pydantic 2.12.5 - Data validation</a:t>
-            </a:r>
-          </a:p>
-          <a:p>
-            <a:pPr>
-              <a:spcBef>
-                <a:spcPts val="800"/>
-              </a:spcBef>
-              <a:spcAft>
-                <a:spcPts val="800"/>
-              </a:spcAft>
-              <a:defRPr sz="1800">
-                <a:solidFill>
-                  <a:srgbClr val="333333"/>
-                </a:solidFill>
-              </a:defRPr>
-            </a:pPr>
-            <a:r>
-              <a:t>🗄️  SQLite/PostgreSQL - Database</a:t>
-            </a:r>
-          </a:p>
-          <a:p>
-            <a:pPr>
-              <a:spcBef>
-                <a:spcPts val="800"/>
-              </a:spcBef>
-              <a:spcAft>
-                <a:spcPts val="800"/>
-              </a:spcAft>
-              <a:defRPr sz="1800">
-                <a:solidFill>
-                  <a:srgbClr val="333333"/>
-                </a:solidFill>
-              </a:defRPr>
-            </a:pPr>
-            <a:r>
-              <a:t>🧪 Pytest 9.0.2 - Testing framework</a:t>
+              <a:spcAft>
+                <a:spcPts val="800"/>
+              </a:spcAft>
+              <a:defRPr sz="2000">
+                <a:solidFill>
+                  <a:srgbClr val="2C3E50"/>
+                </a:solidFill>
+              </a:defRPr>
+            </a:pPr>
+            <a:r>
+              <a:t>200 OK — successful GET / PATCH</a:t>
+            </a:r>
+          </a:p>
+          <a:p>
+            <a:pPr>
+              <a:spcAft>
+                <a:spcPts val="800"/>
+              </a:spcAft>
+              <a:defRPr sz="2000">
+                <a:solidFill>
+                  <a:srgbClr val="2C3E50"/>
+                </a:solidFill>
+              </a:defRPr>
+            </a:pPr>
+            <a:r>
+              <a:t>201 Created — successful POST (habit or log)</a:t>
+            </a:r>
+          </a:p>
+          <a:p>
+            <a:pPr>
+              <a:spcAft>
+                <a:spcPts val="800"/>
+              </a:spcAft>
+              <a:defRPr sz="2000">
+                <a:solidFill>
+                  <a:srgbClr val="2C3E50"/>
+                </a:solidFill>
+              </a:defRPr>
+            </a:pPr>
+            <a:r>
+              <a:t>204 No Content — successful DELETE</a:t>
+            </a:r>
+          </a:p>
+          <a:p>
+            <a:pPr>
+              <a:spcAft>
+                <a:spcPts val="800"/>
+              </a:spcAft>
+              <a:defRPr sz="2000">
+                <a:solidFill>
+                  <a:srgbClr val="2C3E50"/>
+                </a:solidFill>
+              </a:defRPr>
+            </a:pPr>
+            <a:r>
+              <a:t>400 Bad Request — invalid week format or invalid ISO week number</a:t>
+            </a:r>
+          </a:p>
+          <a:p>
+            <a:pPr>
+              <a:spcAft>
+                <a:spcPts val="800"/>
+              </a:spcAft>
+              <a:defRPr sz="2000">
+                <a:solidFill>
+                  <a:srgbClr val="2C3E50"/>
+                </a:solidFill>
+              </a:defRPr>
+            </a:pPr>
+            <a:r>
+              <a:t>401 Unauthorized — missing X-API-Key header</a:t>
+            </a:r>
+          </a:p>
+          <a:p>
+            <a:pPr>
+              <a:spcAft>
+                <a:spcPts val="800"/>
+              </a:spcAft>
+              <a:defRPr sz="2000">
+                <a:solidFill>
+                  <a:srgbClr val="2C3E50"/>
+                </a:solidFill>
+              </a:defRPr>
+            </a:pPr>
+            <a:r>
+              <a:t>403 Forbidden — wrong API key value</a:t>
+            </a:r>
+          </a:p>
+          <a:p>
+            <a:pPr>
+              <a:spcAft>
+                <a:spcPts val="800"/>
+              </a:spcAft>
+              <a:defRPr sz="2000">
+                <a:solidFill>
+                  <a:srgbClr val="2C3E50"/>
+                </a:solidFill>
+              </a:defRPr>
+            </a:pPr>
+            <a:r>
+              <a:t>404 Not Found — habit or log does not exist</a:t>
+            </a:r>
+          </a:p>
+          <a:p>
+            <a:pPr>
+              <a:spcAft>
+                <a:spcPts val="800"/>
+              </a:spcAft>
+              <a:defRPr sz="2000">
+                <a:solidFill>
+                  <a:srgbClr val="2C3E50"/>
+                </a:solidFill>
+              </a:defRPr>
+            </a:pPr>
+            <a:r>
+              <a:t>409 Conflict — duplicate log for same habit + date (DB unique constraint)</a:t>
+            </a:r>
+          </a:p>
+          <a:p>
+            <a:pPr>
+              <a:spcAft>
+                <a:spcPts val="800"/>
+              </a:spcAft>
+              <a:defRPr sz="2000">
+                <a:solidFill>
+                  <a:srgbClr val="2C3E50"/>
+                </a:solidFill>
+              </a:defRPr>
+            </a:pPr>
+            <a:r>
+              <a:t>422 Unprocessable Entity — missing required query params (FastAPI default)</a:t>
+            </a:r>
+          </a:p>
+          <a:p>
+            <a:pPr>
+              <a:spcAft>
+                <a:spcPts val="800"/>
+              </a:spcAft>
+              <a:defRPr sz="2000">
+                <a:solidFill>
+                  <a:srgbClr val="2C3E50"/>
+                </a:solidFill>
+              </a:defRPr>
+            </a:pPr>
+            <a:r>
+              <a:t>500 Internal Server Error — caught by global exception handler middleware</a:t>
             </a:r>
           </a:p>
         </p:txBody>
@@ -4332,9 +5847,17 @@
 </p:sld>
 </file>
 
-<file path=ppt/slides/slide4.xml><?xml version="1.0" encoding="utf-8"?>
+<file path=ppt/slides/slide6.xml><?xml version="1.0" encoding="utf-8"?>
 <p:sld xmlns:a="http://schemas.openxmlformats.org/drawingml/2006/main" xmlns:p="http://schemas.openxmlformats.org/presentationml/2006/main" xmlns:r="http://schemas.openxmlformats.org/officeDocument/2006/relationships">
   <p:cSld>
+    <p:bg>
+      <p:bgPr>
+        <a:solidFill>
+          <a:srgbClr val="FFFFFF"/>
+        </a:solidFill>
+        <a:effectLst/>
+      </p:bgPr>
+    </p:bg>
     <p:spTree>
       <p:nvGrpSpPr>
         <p:cNvPr id="1" name=""/>
@@ -4351,18 +5874,16 @@
         <p:spPr>
           <a:xfrm>
             <a:off x="0" y="0"/>
-            <a:ext cx="9144000" cy="1097280"/>
+            <a:ext cx="12191695" cy="1188720"/>
           </a:xfrm>
           <a:prstGeom prst="rect">
             <a:avLst/>
           </a:prstGeom>
           <a:solidFill>
-            <a:srgbClr val="0066CC"/>
+            <a:srgbClr val="667EEA"/>
           </a:solidFill>
           <a:ln>
-            <a:solidFill>
-              <a:srgbClr val="0066CC"/>
-            </a:solidFill>
+            <a:noFill/>
           </a:ln>
         </p:spPr>
         <p:style>
@@ -4380,24 +5901,18 @@
           </a:fontRef>
         </p:style>
         <p:txBody>
-          <a:bodyPr rtlCol="0" anchor="ctr"/>
-          <a:lstStyle/>
-          <a:p>
-            <a:pPr algn="ctr">
-              <a:spcBef>
-                <a:spcPts val="1000"/>
-              </a:spcBef>
-              <a:spcAft>
-                <a:spcPts val="1000"/>
-              </a:spcAft>
-              <a:defRPr sz="4000" b="1">
+          <a:bodyPr rtlCol="0" anchor="ctr" wrap="square" lIns="731520" tIns="228600"/>
+          <a:lstStyle/>
+          <a:p>
+            <a:pPr algn="l">
+              <a:defRPr sz="3600" b="1">
                 <a:solidFill>
                   <a:srgbClr val="FFFFFF"/>
                 </a:solidFill>
               </a:defRPr>
             </a:pPr>
             <a:r>
-              <a:t>System Architecture</a:t>
+              <a:t>Testing — 14 Tests, All Passing</a:t>
             </a:r>
           </a:p>
         </p:txBody>
@@ -4410,8 +5925,8 @@
         </p:nvSpPr>
         <p:spPr>
           <a:xfrm>
-            <a:off x="457200" y="1371600"/>
-            <a:ext cx="8229600" cy="5029200"/>
+            <a:off x="731520" y="1463040"/>
+            <a:ext cx="5029200" cy="4572000"/>
           </a:xfrm>
           <a:prstGeom prst="rect">
             <a:avLst/>
@@ -4425,110 +5940,319 @@
           <a:lstStyle/>
           <a:p>
             <a:pPr>
-              <a:spcBef>
-                <a:spcPts val="800"/>
-              </a:spcBef>
-              <a:spcAft>
-                <a:spcPts val="800"/>
-              </a:spcAft>
-              <a:defRPr sz="1800">
-                <a:solidFill>
-                  <a:srgbClr val="333333"/>
-                </a:solidFill>
-              </a:defRPr>
-            </a:pPr>
-            <a:r>
-              <a:t>🎨 Layered Architecture:</a:t>
-            </a:r>
-          </a:p>
-          <a:p>
-            <a:pPr>
-              <a:spcBef>
-                <a:spcPts val="800"/>
-              </a:spcBef>
-              <a:spcAft>
-                <a:spcPts val="800"/>
-              </a:spcAft>
-              <a:defRPr sz="1800">
-                <a:solidFill>
-                  <a:srgbClr val="333333"/>
-                </a:solidFill>
-              </a:defRPr>
-            </a:pPr>
-            <a:r>
-              <a:t>  • API Layer (FastAPI + Pydantic)</a:t>
-            </a:r>
-          </a:p>
-          <a:p>
-            <a:pPr>
-              <a:spcBef>
-                <a:spcPts val="800"/>
-              </a:spcBef>
-              <a:spcAft>
-                <a:spcPts val="800"/>
-              </a:spcAft>
-              <a:defRPr sz="1800">
-                <a:solidFill>
-                  <a:srgbClr val="333333"/>
-                </a:solidFill>
-              </a:defRPr>
-            </a:pPr>
-            <a:r>
-              <a:t>  • Router Layer (Modular endpoints)</a:t>
-            </a:r>
-          </a:p>
-          <a:p>
-            <a:pPr>
-              <a:spcBef>
-                <a:spcPts val="800"/>
-              </a:spcBef>
-              <a:spcAft>
-                <a:spcPts val="800"/>
-              </a:spcAft>
-              <a:defRPr sz="1800">
-                <a:solidFill>
-                  <a:srgbClr val="333333"/>
-                </a:solidFill>
-              </a:defRPr>
-            </a:pPr>
-            <a:r>
-              <a:t>  • Service Layer (Business logic)</a:t>
-            </a:r>
-          </a:p>
-          <a:p>
-            <a:pPr>
-              <a:spcBef>
-                <a:spcPts val="800"/>
-              </a:spcBef>
-              <a:spcAft>
-                <a:spcPts val="800"/>
-              </a:spcAft>
-              <a:defRPr sz="1800">
-                <a:solidFill>
-                  <a:srgbClr val="333333"/>
-                </a:solidFill>
-              </a:defRPr>
-            </a:pPr>
-            <a:r>
-              <a:t>  • Data Access Layer (SQLAlchemy ORM)</a:t>
-            </a:r>
-          </a:p>
-          <a:p>
-            <a:pPr>
-              <a:spcBef>
-                <a:spcPts val="800"/>
-              </a:spcBef>
-              <a:spcAft>
-                <a:spcPts val="800"/>
-              </a:spcAft>
-              <a:defRPr sz="1800">
-                <a:solidFill>
-                  <a:srgbClr val="333333"/>
-                </a:solidFill>
-              </a:defRPr>
-            </a:pPr>
-            <a:r>
-              <a:t>  • Database Layer (SQLite/PostgreSQL)</a:t>
+              <a:spcAft>
+                <a:spcPts val="800"/>
+              </a:spcAft>
+              <a:defRPr sz="1900">
+                <a:solidFill>
+                  <a:srgbClr val="2C3E50"/>
+                </a:solidFill>
+              </a:defRPr>
+            </a:pPr>
+            <a:r>
+              <a:t>test_auth.py (4 tests):</a:t>
+            </a:r>
+          </a:p>
+          <a:p>
+            <a:pPr>
+              <a:spcAft>
+                <a:spcPts val="800"/>
+              </a:spcAft>
+              <a:defRPr sz="1900">
+                <a:solidFill>
+                  <a:srgbClr val="2C3E50"/>
+                </a:solidFill>
+              </a:defRPr>
+            </a:pPr>
+            <a:r>
+              <a:t>  • 401 when X-API-Key missing</a:t>
+            </a:r>
+          </a:p>
+          <a:p>
+            <a:pPr>
+              <a:spcAft>
+                <a:spcPts val="800"/>
+              </a:spcAft>
+              <a:defRPr sz="1900">
+                <a:solidFill>
+                  <a:srgbClr val="2C3E50"/>
+                </a:solidFill>
+              </a:defRPr>
+            </a:pPr>
+            <a:r>
+              <a:t>  • 403 when API key invalid</a:t>
+            </a:r>
+          </a:p>
+          <a:p>
+            <a:pPr>
+              <a:spcAft>
+                <a:spcPts val="800"/>
+              </a:spcAft>
+              <a:defRPr sz="1900">
+                <a:solidFill>
+                  <a:srgbClr val="2C3E50"/>
+                </a:solidFill>
+              </a:defRPr>
+            </a:pPr>
+            <a:r>
+              <a:t>  • 200 when API key valid</a:t>
+            </a:r>
+          </a:p>
+          <a:p>
+            <a:pPr>
+              <a:spcAft>
+                <a:spcPts val="800"/>
+              </a:spcAft>
+              <a:defRPr sz="1900">
+                <a:solidFill>
+                  <a:srgbClr val="2C3E50"/>
+                </a:solidFill>
+              </a:defRPr>
+            </a:pPr>
+            <a:r>
+              <a:t>  • Health endpoint behaviour</a:t>
+            </a:r>
+          </a:p>
+          <a:p>
+            <a:pPr>
+              <a:spcAft>
+                <a:spcPts val="800"/>
+              </a:spcAft>
+              <a:defRPr sz="1900">
+                <a:solidFill>
+                  <a:srgbClr val="2C3E50"/>
+                </a:solidFill>
+              </a:defRPr>
+            </a:pPr>
+          </a:p>
+          <a:p>
+            <a:pPr>
+              <a:spcAft>
+                <a:spcPts val="800"/>
+              </a:spcAft>
+              <a:defRPr sz="1900">
+                <a:solidFill>
+                  <a:srgbClr val="2C3E50"/>
+                </a:solidFill>
+              </a:defRPr>
+            </a:pPr>
+            <a:r>
+              <a:t>test_habits.py (3 tests):</a:t>
+            </a:r>
+          </a:p>
+          <a:p>
+            <a:pPr>
+              <a:spcAft>
+                <a:spcPts val="800"/>
+              </a:spcAft>
+              <a:defRPr sz="1900">
+                <a:solidFill>
+                  <a:srgbClr val="2C3E50"/>
+                </a:solidFill>
+              </a:defRPr>
+            </a:pPr>
+            <a:r>
+              <a:t>  • Create + list habits</a:t>
+            </a:r>
+          </a:p>
+          <a:p>
+            <a:pPr>
+              <a:spcAft>
+                <a:spcPts val="800"/>
+              </a:spcAft>
+              <a:defRPr sz="1900">
+                <a:solidFill>
+                  <a:srgbClr val="2C3E50"/>
+                </a:solidFill>
+              </a:defRPr>
+            </a:pPr>
+            <a:r>
+              <a:t>  • PATCH missing habit → 404</a:t>
+            </a:r>
+          </a:p>
+          <a:p>
+            <a:pPr>
+              <a:spcAft>
+                <a:spcPts val="800"/>
+              </a:spcAft>
+              <a:defRPr sz="1900">
+                <a:solidFill>
+                  <a:srgbClr val="2C3E50"/>
+                </a:solidFill>
+              </a:defRPr>
+            </a:pPr>
+            <a:r>
+              <a:t>  • Delete → then GET → 404</a:t>
+            </a:r>
+          </a:p>
+        </p:txBody>
+      </p:sp>
+      <p:sp>
+        <p:nvSpPr>
+          <p:cNvPr id="4" name="TextBox 3"/>
+          <p:cNvSpPr txBox="1"/>
+          <p:nvPr/>
+        </p:nvSpPr>
+        <p:spPr>
+          <a:xfrm>
+            <a:off x="6217920" y="1463040"/>
+            <a:ext cx="5029200" cy="4572000"/>
+          </a:xfrm>
+          <a:prstGeom prst="rect">
+            <a:avLst/>
+          </a:prstGeom>
+          <a:noFill/>
+        </p:spPr>
+        <p:txBody>
+          <a:bodyPr wrap="square">
+            <a:spAutoFit/>
+          </a:bodyPr>
+          <a:lstStyle/>
+          <a:p>
+            <a:pPr>
+              <a:spcAft>
+                <a:spcPts val="800"/>
+              </a:spcAft>
+              <a:defRPr sz="1900">
+                <a:solidFill>
+                  <a:srgbClr val="2C3E50"/>
+                </a:solidFill>
+              </a:defRPr>
+            </a:pPr>
+            <a:r>
+              <a:t>test_logs_and_analytics.py (7 tests):</a:t>
+            </a:r>
+          </a:p>
+          <a:p>
+            <a:pPr>
+              <a:spcAft>
+                <a:spcPts val="800"/>
+              </a:spcAft>
+              <a:defRPr sz="1900">
+                <a:solidFill>
+                  <a:srgbClr val="2C3E50"/>
+                </a:solidFill>
+              </a:defRPr>
+            </a:pPr>
+            <a:r>
+              <a:t>  • Duplicate log → 409 Conflict</a:t>
+            </a:r>
+          </a:p>
+          <a:p>
+            <a:pPr>
+              <a:spcAft>
+                <a:spcPts val="800"/>
+              </a:spcAft>
+              <a:defRPr sz="1900">
+                <a:solidFill>
+                  <a:srgbClr val="2C3E50"/>
+                </a:solidFill>
+              </a:defRPr>
+            </a:pPr>
+            <a:r>
+              <a:t>  • Streak + weekly summary (valid week)</a:t>
+            </a:r>
+          </a:p>
+          <a:p>
+            <a:pPr>
+              <a:spcAft>
+                <a:spcPts val="800"/>
+              </a:spcAft>
+              <a:defRPr sz="1900">
+                <a:solidFill>
+                  <a:srgbClr val="2C3E50"/>
+                </a:solidFill>
+              </a:defRPr>
+            </a:pPr>
+            <a:r>
+              <a:t>  • Invalid week format → 400</a:t>
+            </a:r>
+          </a:p>
+          <a:p>
+            <a:pPr>
+              <a:spcAft>
+                <a:spcPts val="800"/>
+              </a:spcAft>
+              <a:defRPr sz="1900">
+                <a:solidFill>
+                  <a:srgbClr val="2C3E50"/>
+                </a:solidFill>
+              </a:defRPr>
+            </a:pPr>
+            <a:r>
+              <a:t>  • Invalid week number → 400</a:t>
+            </a:r>
+          </a:p>
+          <a:p>
+            <a:pPr>
+              <a:spcAft>
+                <a:spcPts val="800"/>
+              </a:spcAft>
+              <a:defRPr sz="1900">
+                <a:solidFill>
+                  <a:srgbClr val="2C3E50"/>
+                </a:solidFill>
+              </a:defRPr>
+            </a:pPr>
+            <a:r>
+              <a:t>  • Delete missing log → 404</a:t>
+            </a:r>
+          </a:p>
+          <a:p>
+            <a:pPr>
+              <a:spcAft>
+                <a:spcPts val="800"/>
+              </a:spcAft>
+              <a:defRPr sz="1900">
+                <a:solidFill>
+                  <a:srgbClr val="2C3E50"/>
+                </a:solidFill>
+              </a:defRPr>
+            </a:pPr>
+            <a:r>
+              <a:t>  • Log for missing habit → 404</a:t>
+            </a:r>
+          </a:p>
+          <a:p>
+            <a:pPr>
+              <a:spcAft>
+                <a:spcPts val="800"/>
+              </a:spcAft>
+              <a:defRPr sz="1900">
+                <a:solidFill>
+                  <a:srgbClr val="2C3E50"/>
+                </a:solidFill>
+              </a:defRPr>
+            </a:pPr>
+            <a:r>
+              <a:t>  • Missing week param → 422</a:t>
+            </a:r>
+          </a:p>
+          <a:p>
+            <a:pPr>
+              <a:spcAft>
+                <a:spcPts val="800"/>
+              </a:spcAft>
+              <a:defRPr sz="1900">
+                <a:solidFill>
+                  <a:srgbClr val="2C3E50"/>
+                </a:solidFill>
+              </a:defRPr>
+            </a:pPr>
+          </a:p>
+          <a:p>
+            <a:pPr>
+              <a:spcAft>
+                <a:spcPts val="800"/>
+              </a:spcAft>
+              <a:defRPr sz="1900">
+                <a:solidFill>
+                  <a:srgbClr val="2C3E50"/>
+                </a:solidFill>
+              </a:defRPr>
+            </a:pPr>
+            <a:r>
+              <a:t>[Screenshot placeholder: pytest -v output]</a:t>
             </a:r>
           </a:p>
         </p:txBody>
@@ -4541,9 +6265,17 @@
 </p:sld>
 </file>
 
-<file path=ppt/slides/slide5.xml><?xml version="1.0" encoding="utf-8"?>
+<file path=ppt/slides/slide7.xml><?xml version="1.0" encoding="utf-8"?>
 <p:sld xmlns:a="http://schemas.openxmlformats.org/drawingml/2006/main" xmlns:p="http://schemas.openxmlformats.org/presentationml/2006/main" xmlns:r="http://schemas.openxmlformats.org/officeDocument/2006/relationships">
   <p:cSld>
+    <p:bg>
+      <p:bgPr>
+        <a:solidFill>
+          <a:srgbClr val="FFFFFF"/>
+        </a:solidFill>
+        <a:effectLst/>
+      </p:bgPr>
+    </p:bg>
     <p:spTree>
       <p:nvGrpSpPr>
         <p:cNvPr id="1" name=""/>
@@ -4560,18 +6292,16 @@
         <p:spPr>
           <a:xfrm>
             <a:off x="0" y="0"/>
-            <a:ext cx="9144000" cy="1097280"/>
+            <a:ext cx="12191695" cy="1188720"/>
           </a:xfrm>
           <a:prstGeom prst="rect">
             <a:avLst/>
           </a:prstGeom>
           <a:solidFill>
-            <a:srgbClr val="0066CC"/>
+            <a:srgbClr val="667EEA"/>
           </a:solidFill>
           <a:ln>
-            <a:solidFill>
-              <a:srgbClr val="0066CC"/>
-            </a:solidFill>
+            <a:noFill/>
           </a:ln>
         </p:spPr>
         <p:style>
@@ -4589,24 +6319,18 @@
           </a:fontRef>
         </p:style>
         <p:txBody>
-          <a:bodyPr rtlCol="0" anchor="ctr"/>
-          <a:lstStyle/>
-          <a:p>
-            <a:pPr algn="ctr">
-              <a:spcBef>
-                <a:spcPts val="1000"/>
-              </a:spcBef>
-              <a:spcAft>
-                <a:spcPts val="1000"/>
-              </a:spcAft>
-              <a:defRPr sz="4000" b="1">
+          <a:bodyPr rtlCol="0" anchor="ctr" wrap="square" lIns="731520" tIns="228600"/>
+          <a:lstStyle/>
+          <a:p>
+            <a:pPr algn="l">
+              <a:defRPr sz="3600" b="1">
                 <a:solidFill>
                   <a:srgbClr val="FFFFFF"/>
                 </a:solidFill>
               </a:defRPr>
             </a:pPr>
             <a:r>
-              <a:t>Key Features</a:t>
+              <a:t>Version Control — 49 Commits on main</a:t>
             </a:r>
           </a:p>
         </p:txBody>
@@ -4619,8 +6343,8 @@
         </p:nvSpPr>
         <p:spPr>
           <a:xfrm>
-            <a:off x="457200" y="1371600"/>
-            <a:ext cx="8229600" cy="5029200"/>
+            <a:off x="731520" y="1463040"/>
+            <a:ext cx="10515600" cy="4572000"/>
           </a:xfrm>
           <a:prstGeom prst="rect">
             <a:avLst/>
@@ -4634,92 +6358,206 @@
           <a:lstStyle/>
           <a:p>
             <a:pPr>
-              <a:spcBef>
-                <a:spcPts val="800"/>
-              </a:spcBef>
               <a:spcAft>
                 <a:spcPts val="800"/>
               </a:spcAft>
               <a:defRPr sz="1800">
                 <a:solidFill>
-                  <a:srgbClr val="333333"/>
-                </a:solidFill>
-              </a:defRPr>
-            </a:pPr>
-            <a:r>
-              <a:t>📝 Habit Management - Create, read, update, delete</a:t>
-            </a:r>
-          </a:p>
-          <a:p>
-            <a:pPr>
-              <a:spcBef>
-                <a:spcPts val="800"/>
-              </a:spcBef>
+                  <a:srgbClr val="2C3E50"/>
+                </a:solidFill>
+              </a:defRPr>
+            </a:pPr>
+            <a:r>
+              <a:t>Selected milestones from git log:</a:t>
+            </a:r>
+          </a:p>
+          <a:p>
+            <a:pPr>
               <a:spcAft>
                 <a:spcPts val="800"/>
               </a:spcAft>
               <a:defRPr sz="1800">
                 <a:solidFill>
-                  <a:srgbClr val="333333"/>
-                </a:solidFill>
-              </a:defRPr>
-            </a:pPr>
-            <a:r>
-              <a:t>📅 Completion Logging - Track daily completions</a:t>
-            </a:r>
-          </a:p>
-          <a:p>
-            <a:pPr>
-              <a:spcBef>
-                <a:spcPts val="800"/>
-              </a:spcBef>
+                  <a:srgbClr val="2C3E50"/>
+                </a:solidFill>
+              </a:defRPr>
+            </a:pPr>
+          </a:p>
+          <a:p>
+            <a:pPr>
               <a:spcAft>
                 <a:spcPts val="800"/>
               </a:spcAft>
               <a:defRPr sz="1800">
                 <a:solidFill>
-                  <a:srgbClr val="333333"/>
-                </a:solidFill>
-              </a:defRPr>
-            </a:pPr>
-            <a:r>
-              <a:t>📊 Analytics - Streak calculation &amp; summaries</a:t>
-            </a:r>
-          </a:p>
-          <a:p>
-            <a:pPr>
-              <a:spcBef>
-                <a:spcPts val="800"/>
-              </a:spcBef>
+                  <a:srgbClr val="2C3E50"/>
+                </a:solidFill>
+              </a:defRPr>
+            </a:pPr>
+            <a:r>
+              <a:t>5d856f3  Repo scaffold — project structure, docs placeholders, tooling files</a:t>
+            </a:r>
+          </a:p>
+          <a:p>
+            <a:pPr>
               <a:spcAft>
                 <a:spcPts val="800"/>
               </a:spcAft>
               <a:defRPr sz="1800">
                 <a:solidFill>
-                  <a:srgbClr val="333333"/>
-                </a:solidFill>
-              </a:defRPr>
-            </a:pPr>
-            <a:r>
-              <a:t>📄 Pagination - Efficient data retrieval</a:t>
-            </a:r>
-          </a:p>
-          <a:p>
-            <a:pPr>
-              <a:spcBef>
-                <a:spcPts val="800"/>
-              </a:spcBef>
+                  <a:srgbClr val="2C3E50"/>
+                </a:solidFill>
+              </a:defRPr>
+            </a:pPr>
+            <a:r>
+              <a:t>f39f338  FastAPI app skeleton + health endpoint</a:t>
+            </a:r>
+          </a:p>
+          <a:p>
+            <a:pPr>
               <a:spcAft>
                 <a:spcPts val="800"/>
               </a:spcAft>
               <a:defRPr sz="1800">
                 <a:solidFill>
-                  <a:srgbClr val="333333"/>
-                </a:solidFill>
-              </a:defRPr>
-            </a:pPr>
-            <a:r>
-              <a:t>🛡️  Error Handling - Comprehensive validation</a:t>
+                  <a:srgbClr val="2C3E50"/>
+                </a:solidFill>
+              </a:defRPr>
+            </a:pPr>
+            <a:r>
+              <a:t>e9b701d  DB config, SQLAlchemy models, Alembic setup</a:t>
+            </a:r>
+          </a:p>
+          <a:p>
+            <a:pPr>
+              <a:spcAft>
+                <a:spcPts val="800"/>
+              </a:spcAft>
+              <a:defRPr sz="1800">
+                <a:solidFill>
+                  <a:srgbClr val="2C3E50"/>
+                </a:solidFill>
+              </a:defRPr>
+            </a:pPr>
+            <a:r>
+              <a:t>02406d5  fix(deploy): ensure DB schema exists on Render startup</a:t>
+            </a:r>
+          </a:p>
+          <a:p>
+            <a:pPr>
+              <a:spcAft>
+                <a:spcPts val="800"/>
+              </a:spcAft>
+              <a:defRPr sz="1800">
+                <a:solidFill>
+                  <a:srgbClr val="2C3E50"/>
+                </a:solidFill>
+              </a:defRPr>
+            </a:pPr>
+            <a:r>
+              <a:t>2025cac  fix(analytics): return 400 for invalid ISO week values</a:t>
+            </a:r>
+          </a:p>
+          <a:p>
+            <a:pPr>
+              <a:spcAft>
+                <a:spcPts val="800"/>
+              </a:spcAft>
+              <a:defRPr sz="1800">
+                <a:solidFill>
+                  <a:srgbClr val="2C3E50"/>
+                </a:solidFill>
+              </a:defRPr>
+            </a:pPr>
+            <a:r>
+              <a:t>6244e15  test: add extra edge-case tests for habits + analytics</a:t>
+            </a:r>
+          </a:p>
+          <a:p>
+            <a:pPr>
+              <a:spcAft>
+                <a:spcPts val="800"/>
+              </a:spcAft>
+              <a:defRPr sz="1800">
+                <a:solidFill>
+                  <a:srgbClr val="2C3E50"/>
+                </a:solidFill>
+              </a:defRPr>
+            </a:pPr>
+            <a:r>
+              <a:t>dc00a04  feat: add API key authentication + web dashboard</a:t>
+            </a:r>
+          </a:p>
+          <a:p>
+            <a:pPr>
+              <a:spcAft>
+                <a:spcPts val="800"/>
+              </a:spcAft>
+              <a:defRPr sz="1800">
+                <a:solidFill>
+                  <a:srgbClr val="2C3E50"/>
+                </a:solidFill>
+              </a:defRPr>
+            </a:pPr>
+            <a:r>
+              <a:t>0a69604  fix(ui): correct 409 toast handling + remove duplicate loadHabits</a:t>
+            </a:r>
+          </a:p>
+          <a:p>
+            <a:pPr>
+              <a:spcAft>
+                <a:spcPts val="800"/>
+              </a:spcAft>
+              <a:defRPr sz="1800">
+                <a:solidFill>
+                  <a:srgbClr val="2C3E50"/>
+                </a:solidFill>
+              </a:defRPr>
+            </a:pPr>
+            <a:r>
+              <a:t>12a42d6  docs(ai): add GenAI declaration PDF</a:t>
+            </a:r>
+          </a:p>
+          <a:p>
+            <a:pPr>
+              <a:spcAft>
+                <a:spcPts val="800"/>
+              </a:spcAft>
+              <a:defRPr sz="1800">
+                <a:solidFill>
+                  <a:srgbClr val="2C3E50"/>
+                </a:solidFill>
+              </a:defRPr>
+            </a:pPr>
+          </a:p>
+          <a:p>
+            <a:pPr>
+              <a:spcAft>
+                <a:spcPts val="800"/>
+              </a:spcAft>
+              <a:defRPr sz="1800">
+                <a:solidFill>
+                  <a:srgbClr val="2C3E50"/>
+                </a:solidFill>
+              </a:defRPr>
+            </a:pPr>
+            <a:r>
+              <a:t>Conventional commit messages used throughout (feat / fix / docs / test / chore)</a:t>
+            </a:r>
+          </a:p>
+          <a:p>
+            <a:pPr>
+              <a:spcAft>
+                <a:spcPts val="800"/>
+              </a:spcAft>
+              <a:defRPr sz="1800">
+                <a:solidFill>
+                  <a:srgbClr val="2C3E50"/>
+                </a:solidFill>
+              </a:defRPr>
+            </a:pPr>
+            <a:r>
+              <a:t>[Screenshot placeholder: git log --oneline terminal output]</a:t>
             </a:r>
           </a:p>
         </p:txBody>
@@ -4732,9 +6570,17 @@
 </p:sld>
 </file>
 
-<file path=ppt/slides/slide6.xml><?xml version="1.0" encoding="utf-8"?>
+<file path=ppt/slides/slide8.xml><?xml version="1.0" encoding="utf-8"?>
 <p:sld xmlns:a="http://schemas.openxmlformats.org/drawingml/2006/main" xmlns:p="http://schemas.openxmlformats.org/presentationml/2006/main" xmlns:r="http://schemas.openxmlformats.org/officeDocument/2006/relationships">
   <p:cSld>
+    <p:bg>
+      <p:bgPr>
+        <a:solidFill>
+          <a:srgbClr val="FFFFFF"/>
+        </a:solidFill>
+        <a:effectLst/>
+      </p:bgPr>
+    </p:bg>
     <p:spTree>
       <p:nvGrpSpPr>
         <p:cNvPr id="1" name=""/>
@@ -4751,18 +6597,16 @@
         <p:spPr>
           <a:xfrm>
             <a:off x="0" y="0"/>
-            <a:ext cx="9144000" cy="1097280"/>
+            <a:ext cx="12191695" cy="1188720"/>
           </a:xfrm>
           <a:prstGeom prst="rect">
             <a:avLst/>
           </a:prstGeom>
           <a:solidFill>
-            <a:srgbClr val="0066CC"/>
+            <a:srgbClr val="667EEA"/>
           </a:solidFill>
           <a:ln>
-            <a:solidFill>
-              <a:srgbClr val="0066CC"/>
-            </a:solidFill>
+            <a:noFill/>
           </a:ln>
         </p:spPr>
         <p:style>
@@ -4780,24 +6624,18 @@
           </a:fontRef>
         </p:style>
         <p:txBody>
-          <a:bodyPr rtlCol="0" anchor="ctr"/>
-          <a:lstStyle/>
-          <a:p>
-            <a:pPr algn="ctr">
-              <a:spcBef>
-                <a:spcPts val="1000"/>
-              </a:spcBef>
-              <a:spcAft>
-                <a:spcPts val="1000"/>
-              </a:spcAft>
-              <a:defRPr sz="4000" b="1">
+          <a:bodyPr rtlCol="0" anchor="ctr" wrap="square" lIns="731520" tIns="228600"/>
+          <a:lstStyle/>
+          <a:p>
+            <a:pPr algn="l">
+              <a:defRPr sz="3600" b="1">
                 <a:solidFill>
                   <a:srgbClr val="FFFFFF"/>
                 </a:solidFill>
               </a:defRPr>
             </a:pPr>
             <a:r>
-              <a:t>API Endpoints (12 total)</a:t>
+              <a:t>Deployment on Render</a:t>
             </a:r>
           </a:p>
         </p:txBody>
@@ -4810,8 +6648,8 @@
         </p:nvSpPr>
         <p:spPr>
           <a:xfrm>
-            <a:off x="457200" y="1371600"/>
-            <a:ext cx="8229600" cy="5029200"/>
+            <a:off x="731520" y="1463040"/>
+            <a:ext cx="5029200" cy="4572000"/>
           </a:xfrm>
           <a:prstGeom prst="rect">
             <a:avLst/>
@@ -4825,92 +6663,316 @@
           <a:lstStyle/>
           <a:p>
             <a:pPr>
-              <a:spcBef>
-                <a:spcPts val="800"/>
-              </a:spcBef>
-              <a:spcAft>
-                <a:spcPts val="800"/>
-              </a:spcAft>
-              <a:defRPr sz="1800">
-                <a:solidFill>
-                  <a:srgbClr val="333333"/>
-                </a:solidFill>
-              </a:defRPr>
-            </a:pPr>
-            <a:r>
-              <a:t>Habits: POST, GET, PATCH, DELETE /habits</a:t>
-            </a:r>
-          </a:p>
-          <a:p>
-            <a:pPr>
-              <a:spcBef>
-                <a:spcPts val="800"/>
-              </a:spcBef>
-              <a:spcAft>
-                <a:spcPts val="800"/>
-              </a:spcAft>
-              <a:defRPr sz="1800">
-                <a:solidFill>
-                  <a:srgbClr val="333333"/>
-                </a:solidFill>
-              </a:defRPr>
-            </a:pPr>
-            <a:r>
-              <a:t>Logs: POST, GET, DELETE /habits/{id}/logs</a:t>
-            </a:r>
-          </a:p>
-          <a:p>
-            <a:pPr>
-              <a:spcBef>
-                <a:spcPts val="800"/>
-              </a:spcBef>
-              <a:spcAft>
-                <a:spcPts val="800"/>
-              </a:spcAft>
-              <a:defRPr sz="1800">
-                <a:solidFill>
-                  <a:srgbClr val="333333"/>
-                </a:solidFill>
-              </a:defRPr>
-            </a:pPr>
-            <a:r>
-              <a:t>Analytics: GET /habits/{id}/streak</a:t>
-            </a:r>
-          </a:p>
-          <a:p>
-            <a:pPr>
-              <a:spcBef>
-                <a:spcPts val="800"/>
-              </a:spcBef>
-              <a:spcAft>
-                <a:spcPts val="800"/>
-              </a:spcAft>
-              <a:defRPr sz="1800">
-                <a:solidFill>
-                  <a:srgbClr val="333333"/>
-                </a:solidFill>
-              </a:defRPr>
-            </a:pPr>
-            <a:r>
-              <a:t>Analytics: GET /analytics/weekly-summary</a:t>
-            </a:r>
-          </a:p>
-          <a:p>
-            <a:pPr>
-              <a:spcBef>
-                <a:spcPts val="800"/>
-              </a:spcBef>
-              <a:spcAft>
-                <a:spcPts val="800"/>
-              </a:spcAft>
-              <a:defRPr sz="1800">
-                <a:solidFill>
-                  <a:srgbClr val="333333"/>
-                </a:solidFill>
-              </a:defRPr>
-            </a:pPr>
-            <a:r>
-              <a:t>Health: GET /health</a:t>
+              <a:spcAft>
+                <a:spcPts val="800"/>
+              </a:spcAft>
+              <a:defRPr sz="1900">
+                <a:solidFill>
+                  <a:srgbClr val="2C3E50"/>
+                </a:solidFill>
+              </a:defRPr>
+            </a:pPr>
+            <a:r>
+              <a:t>Platform: Render (free tier)</a:t>
+            </a:r>
+          </a:p>
+          <a:p>
+            <a:pPr>
+              <a:spcAft>
+                <a:spcPts val="800"/>
+              </a:spcAft>
+              <a:defRPr sz="1900">
+                <a:solidFill>
+                  <a:srgbClr val="2C3E50"/>
+                </a:solidFill>
+              </a:defRPr>
+            </a:pPr>
+            <a:r>
+              <a:t>URL: comp3011-cw1-habit-api.onrender.com</a:t>
+            </a:r>
+          </a:p>
+          <a:p>
+            <a:pPr>
+              <a:spcAft>
+                <a:spcPts val="800"/>
+              </a:spcAft>
+              <a:defRPr sz="1900">
+                <a:solidFill>
+                  <a:srgbClr val="2C3E50"/>
+                </a:solidFill>
+              </a:defRPr>
+            </a:pPr>
+            <a:r>
+              <a:t>Auto-deploy: pushes to main trigger redeploy</a:t>
+            </a:r>
+          </a:p>
+          <a:p>
+            <a:pPr>
+              <a:spcAft>
+                <a:spcPts val="800"/>
+              </a:spcAft>
+              <a:defRPr sz="1900">
+                <a:solidFill>
+                  <a:srgbClr val="2C3E50"/>
+                </a:solidFill>
+              </a:defRPr>
+            </a:pPr>
+            <a:r>
+              <a:t>Start command: uvicorn app.main:app --host 0.0.0.0</a:t>
+            </a:r>
+          </a:p>
+          <a:p>
+            <a:pPr>
+              <a:spcAft>
+                <a:spcPts val="800"/>
+              </a:spcAft>
+              <a:defRPr sz="1900">
+                <a:solidFill>
+                  <a:srgbClr val="2C3E50"/>
+                </a:solidFill>
+              </a:defRPr>
+            </a:pPr>
+          </a:p>
+          <a:p>
+            <a:pPr>
+              <a:spcAft>
+                <a:spcPts val="800"/>
+              </a:spcAft>
+              <a:defRPr sz="1900">
+                <a:solidFill>
+                  <a:srgbClr val="2C3E50"/>
+                </a:solidFill>
+              </a:defRPr>
+            </a:pPr>
+            <a:r>
+              <a:t>Verified endpoints:</a:t>
+            </a:r>
+          </a:p>
+          <a:p>
+            <a:pPr>
+              <a:spcAft>
+                <a:spcPts val="800"/>
+              </a:spcAft>
+              <a:defRPr sz="1900">
+                <a:solidFill>
+                  <a:srgbClr val="2C3E50"/>
+                </a:solidFill>
+              </a:defRPr>
+            </a:pPr>
+            <a:r>
+              <a:t>  /health           → 200 ✓</a:t>
+            </a:r>
+          </a:p>
+          <a:p>
+            <a:pPr>
+              <a:spcAft>
+                <a:spcPts val="800"/>
+              </a:spcAft>
+              <a:defRPr sz="1900">
+                <a:solidFill>
+                  <a:srgbClr val="2C3E50"/>
+                </a:solidFill>
+              </a:defRPr>
+            </a:pPr>
+            <a:r>
+              <a:t>  /docs             → Swagger UI ✓</a:t>
+            </a:r>
+          </a:p>
+          <a:p>
+            <a:pPr>
+              <a:spcAft>
+                <a:spcPts val="800"/>
+              </a:spcAft>
+              <a:defRPr sz="1900">
+                <a:solidFill>
+                  <a:srgbClr val="2C3E50"/>
+                </a:solidFill>
+              </a:defRPr>
+            </a:pPr>
+            <a:r>
+              <a:t>  /api/habits       → 200 (with API key) ✓</a:t>
+            </a:r>
+          </a:p>
+          <a:p>
+            <a:pPr>
+              <a:spcAft>
+                <a:spcPts val="800"/>
+              </a:spcAft>
+              <a:defRPr sz="1900">
+                <a:solidFill>
+                  <a:srgbClr val="2C3E50"/>
+                </a:solidFill>
+              </a:defRPr>
+            </a:pPr>
+            <a:r>
+              <a:t>  /ui/              → web dashboard ✓</a:t>
+            </a:r>
+          </a:p>
+        </p:txBody>
+      </p:sp>
+      <p:sp>
+        <p:nvSpPr>
+          <p:cNvPr id="4" name="TextBox 3"/>
+          <p:cNvSpPr txBox="1"/>
+          <p:nvPr/>
+        </p:nvSpPr>
+        <p:spPr>
+          <a:xfrm>
+            <a:off x="6217920" y="1463040"/>
+            <a:ext cx="5029200" cy="4572000"/>
+          </a:xfrm>
+          <a:prstGeom prst="rect">
+            <a:avLst/>
+          </a:prstGeom>
+          <a:noFill/>
+        </p:spPr>
+        <p:txBody>
+          <a:bodyPr wrap="square">
+            <a:spAutoFit/>
+          </a:bodyPr>
+          <a:lstStyle/>
+          <a:p>
+            <a:pPr>
+              <a:spcAft>
+                <a:spcPts val="800"/>
+              </a:spcAft>
+              <a:defRPr sz="1900">
+                <a:solidFill>
+                  <a:srgbClr val="2C3E50"/>
+                </a:solidFill>
+              </a:defRPr>
+            </a:pPr>
+            <a:r>
+              <a:t>Deployment incident &amp; fix:</a:t>
+            </a:r>
+          </a:p>
+          <a:p>
+            <a:pPr>
+              <a:spcAft>
+                <a:spcPts val="800"/>
+              </a:spcAft>
+              <a:defRPr sz="1900">
+                <a:solidFill>
+                  <a:srgbClr val="2C3E50"/>
+                </a:solidFill>
+              </a:defRPr>
+            </a:pPr>
+            <a:r>
+              <a:t>  Problem: /api/habits returned 500</a:t>
+            </a:r>
+          </a:p>
+          <a:p>
+            <a:pPr>
+              <a:spcAft>
+                <a:spcPts val="800"/>
+              </a:spcAft>
+              <a:defRPr sz="1900">
+                <a:solidFill>
+                  <a:srgbClr val="2C3E50"/>
+                </a:solidFill>
+              </a:defRPr>
+            </a:pPr>
+            <a:r>
+              <a:t>  Cause: "no such table: habits" — SQLite DB</a:t>
+            </a:r>
+          </a:p>
+          <a:p>
+            <a:pPr>
+              <a:spcAft>
+                <a:spcPts val="800"/>
+              </a:spcAft>
+              <a:defRPr sz="1900">
+                <a:solidFill>
+                  <a:srgbClr val="2C3E50"/>
+                </a:solidFill>
+              </a:defRPr>
+            </a:pPr>
+            <a:r>
+              <a:t>    was empty on Render (no Alembic migration ran)</a:t>
+            </a:r>
+          </a:p>
+          <a:p>
+            <a:pPr>
+              <a:spcAft>
+                <a:spcPts val="800"/>
+              </a:spcAft>
+              <a:defRPr sz="1900">
+                <a:solidFill>
+                  <a:srgbClr val="2C3E50"/>
+                </a:solidFill>
+              </a:defRPr>
+            </a:pPr>
+          </a:p>
+          <a:p>
+            <a:pPr>
+              <a:spcAft>
+                <a:spcPts val="800"/>
+              </a:spcAft>
+              <a:defRPr sz="1900">
+                <a:solidFill>
+                  <a:srgbClr val="2C3E50"/>
+                </a:solidFill>
+              </a:defRPr>
+            </a:pPr>
+            <a:r>
+              <a:t>  Fix: added Base.metadata.create_all(bind=engine)</a:t>
+            </a:r>
+          </a:p>
+          <a:p>
+            <a:pPr>
+              <a:spcAft>
+                <a:spcPts val="800"/>
+              </a:spcAft>
+              <a:defRPr sz="1900">
+                <a:solidFill>
+                  <a:srgbClr val="2C3E50"/>
+                </a:solidFill>
+              </a:defRPr>
+            </a:pPr>
+            <a:r>
+              <a:t>    in app/main.py lifespan startup handler</a:t>
+            </a:r>
+          </a:p>
+          <a:p>
+            <a:pPr>
+              <a:spcAft>
+                <a:spcPts val="800"/>
+              </a:spcAft>
+              <a:defRPr sz="1900">
+                <a:solidFill>
+                  <a:srgbClr val="2C3E50"/>
+                </a:solidFill>
+              </a:defRPr>
+            </a:pPr>
+            <a:r>
+              <a:t>  Commits: 871826a → 0afbff2 → 02406d5</a:t>
+            </a:r>
+          </a:p>
+          <a:p>
+            <a:pPr>
+              <a:spcAft>
+                <a:spcPts val="800"/>
+              </a:spcAft>
+              <a:defRPr sz="1900">
+                <a:solidFill>
+                  <a:srgbClr val="2C3E50"/>
+                </a:solidFill>
+              </a:defRPr>
+            </a:pPr>
+          </a:p>
+          <a:p>
+            <a:pPr>
+              <a:spcAft>
+                <a:spcPts val="800"/>
+              </a:spcAft>
+              <a:defRPr sz="1900">
+                <a:solidFill>
+                  <a:srgbClr val="2C3E50"/>
+                </a:solidFill>
+              </a:defRPr>
+            </a:pPr>
+            <a:r>
+              <a:t>[Screenshot placeholder: Render dashboard / /habits 200]</a:t>
             </a:r>
           </a:p>
         </p:txBody>
@@ -4923,9 +6985,17 @@
 </p:sld>
 </file>
 
-<file path=ppt/slides/slide7.xml><?xml version="1.0" encoding="utf-8"?>
+<file path=ppt/slides/slide9.xml><?xml version="1.0" encoding="utf-8"?>
 <p:sld xmlns:a="http://schemas.openxmlformats.org/drawingml/2006/main" xmlns:p="http://schemas.openxmlformats.org/presentationml/2006/main" xmlns:r="http://schemas.openxmlformats.org/officeDocument/2006/relationships">
   <p:cSld>
+    <p:bg>
+      <p:bgPr>
+        <a:solidFill>
+          <a:srgbClr val="FFFFFF"/>
+        </a:solidFill>
+        <a:effectLst/>
+      </p:bgPr>
+    </p:bg>
     <p:spTree>
       <p:nvGrpSpPr>
         <p:cNvPr id="1" name=""/>
@@ -4942,18 +7012,16 @@
         <p:spPr>
           <a:xfrm>
             <a:off x="0" y="0"/>
-            <a:ext cx="9144000" cy="1097280"/>
+            <a:ext cx="12191695" cy="1188720"/>
           </a:xfrm>
           <a:prstGeom prst="rect">
             <a:avLst/>
           </a:prstGeom>
           <a:solidFill>
-            <a:srgbClr val="0066CC"/>
+            <a:srgbClr val="667EEA"/>
           </a:solidFill>
           <a:ln>
-            <a:solidFill>
-              <a:srgbClr val="0066CC"/>
-            </a:solidFill>
+            <a:noFill/>
           </a:ln>
         </p:spPr>
         <p:style>
@@ -4971,24 +7039,18 @@
           </a:fontRef>
         </p:style>
         <p:txBody>
-          <a:bodyPr rtlCol="0" anchor="ctr"/>
-          <a:lstStyle/>
-          <a:p>
-            <a:pPr algn="ctr">
-              <a:spcBef>
-                <a:spcPts val="1000"/>
-              </a:spcBef>
-              <a:spcAft>
-                <a:spcPts val="1000"/>
-              </a:spcAft>
-              <a:defRPr sz="4000" b="1">
+          <a:bodyPr rtlCol="0" anchor="ctr" wrap="square" lIns="731520" tIns="228600"/>
+          <a:lstStyle/>
+          <a:p>
+            <a:pPr algn="l">
+              <a:defRPr sz="3600" b="1">
                 <a:solidFill>
                   <a:srgbClr val="FFFFFF"/>
                 </a:solidFill>
               </a:defRPr>
             </a:pPr>
             <a:r>
-              <a:t>Database Schema</a:t>
+              <a:t>Deliverables Checklist</a:t>
             </a:r>
           </a:p>
         </p:txBody>
@@ -5001,8 +7063,8 @@
         </p:nvSpPr>
         <p:spPr>
           <a:xfrm>
-            <a:off x="457200" y="1371600"/>
-            <a:ext cx="8229600" cy="5029200"/>
+            <a:off x="731520" y="1463040"/>
+            <a:ext cx="5029200" cy="4572000"/>
           </a:xfrm>
           <a:prstGeom prst="rect">
             <a:avLst/>
@@ -5016,184 +7078,163 @@
           <a:lstStyle/>
           <a:p>
             <a:pPr>
-              <a:spcBef>
-                <a:spcPts val="800"/>
-              </a:spcBef>
-              <a:spcAft>
-                <a:spcPts val="800"/>
-              </a:spcAft>
-              <a:defRPr sz="1800">
-                <a:solidFill>
-                  <a:srgbClr val="333333"/>
-                </a:solidFill>
-              </a:defRPr>
-            </a:pPr>
-            <a:r>
-              <a:t>📊 Habits Table:</a:t>
-            </a:r>
-          </a:p>
-          <a:p>
-            <a:pPr>
-              <a:spcBef>
-                <a:spcPts val="800"/>
-              </a:spcBef>
-              <a:spcAft>
-                <a:spcPts val="800"/>
-              </a:spcAft>
-              <a:defRPr sz="1800">
-                <a:solidFill>
-                  <a:srgbClr val="333333"/>
-                </a:solidFill>
-              </a:defRPr>
-            </a:pPr>
-            <a:r>
-              <a:t>  • id, name, description, frequency, is_active, created_at</a:t>
-            </a:r>
-          </a:p>
-          <a:p>
-            <a:pPr>
-              <a:spcBef>
-                <a:spcPts val="800"/>
-              </a:spcBef>
-              <a:spcAft>
-                <a:spcPts val="800"/>
-              </a:spcAft>
-              <a:defRPr sz="1800">
-                <a:solidFill>
-                  <a:srgbClr val="333333"/>
-                </a:solidFill>
-              </a:defRPr>
-            </a:pPr>
-            <a:r>
-              <a:t>📊 Habit_Logs Table:</a:t>
-            </a:r>
-          </a:p>
-          <a:p>
-            <a:pPr>
-              <a:spcBef>
-                <a:spcPts val="800"/>
-              </a:spcBef>
-              <a:spcAft>
-                <a:spcPts val="800"/>
-              </a:spcAft>
-              <a:defRPr sz="1800">
-                <a:solidFill>
-                  <a:srgbClr val="333333"/>
-                </a:solidFill>
-              </a:defRPr>
-            </a:pPr>
-            <a:r>
-              <a:t>  • id, habit_id (FK), date, notes</a:t>
-            </a:r>
-          </a:p>
-          <a:p>
-            <a:pPr>
-              <a:spcBef>
-                <a:spcPts val="800"/>
-              </a:spcBef>
-              <a:spcAft>
-                <a:spcPts val="800"/>
-              </a:spcAft>
-              <a:defRPr sz="1800">
-                <a:solidFill>
-                  <a:srgbClr val="333333"/>
-                </a:solidFill>
-              </a:defRPr>
-            </a:pPr>
-            <a:r>
-              <a:t>  • Unique constraint: (habit_id, date)</a:t>
-            </a:r>
-          </a:p>
-        </p:txBody>
-      </p:sp>
-    </p:spTree>
-  </p:cSld>
-  <p:clrMapOvr>
-    <a:masterClrMapping/>
-  </p:clrMapOvr>
-</p:sld>
-</file>
-
-<file path=ppt/slides/slide8.xml><?xml version="1.0" encoding="utf-8"?>
-<p:sld xmlns:a="http://schemas.openxmlformats.org/drawingml/2006/main" xmlns:p="http://schemas.openxmlformats.org/presentationml/2006/main" xmlns:r="http://schemas.openxmlformats.org/officeDocument/2006/relationships">
-  <p:cSld>
-    <p:spTree>
-      <p:nvGrpSpPr>
-        <p:cNvPr id="1" name=""/>
-        <p:cNvGrpSpPr/>
-        <p:nvPr/>
-      </p:nvGrpSpPr>
-      <p:grpSpPr/>
-      <p:sp>
-        <p:nvSpPr>
-          <p:cNvPr id="2" name="Rectangle 1"/>
-          <p:cNvSpPr/>
+              <a:spcAft>
+                <a:spcPts val="800"/>
+              </a:spcAft>
+              <a:defRPr sz="1900">
+                <a:solidFill>
+                  <a:srgbClr val="2C3E50"/>
+                </a:solidFill>
+              </a:defRPr>
+            </a:pPr>
+            <a:r>
+              <a:t>Repository (GitHub):</a:t>
+            </a:r>
+          </a:p>
+          <a:p>
+            <a:pPr>
+              <a:spcAft>
+                <a:spcPts val="800"/>
+              </a:spcAft>
+              <a:defRPr sz="1900">
+                <a:solidFill>
+                  <a:srgbClr val="2C3E50"/>
+                </a:solidFill>
+              </a:defRPr>
+            </a:pPr>
+            <a:r>
+              <a:t>  ✓ Source code — app/, tests/, migrations/</a:t>
+            </a:r>
+          </a:p>
+          <a:p>
+            <a:pPr>
+              <a:spcAft>
+                <a:spcPts val="800"/>
+              </a:spcAft>
+              <a:defRPr sz="1900">
+                <a:solidFill>
+                  <a:srgbClr val="2C3E50"/>
+                </a:solidFill>
+              </a:defRPr>
+            </a:pPr>
+            <a:r>
+              <a:t>  ✓ README.md — setup, run, architecture</a:t>
+            </a:r>
+          </a:p>
+          <a:p>
+            <a:pPr>
+              <a:spcAft>
+                <a:spcPts val="800"/>
+              </a:spcAft>
+              <a:defRPr sz="1900">
+                <a:solidFill>
+                  <a:srgbClr val="2C3E50"/>
+                </a:solidFill>
+              </a:defRPr>
+            </a:pPr>
+            <a:r>
+              <a:t>  ✓ requirements.txt</a:t>
+            </a:r>
+          </a:p>
+          <a:p>
+            <a:pPr>
+              <a:spcAft>
+                <a:spcPts val="800"/>
+              </a:spcAft>
+              <a:defRPr sz="1900">
+                <a:solidFill>
+                  <a:srgbClr val="2C3E50"/>
+                </a:solidFill>
+              </a:defRPr>
+            </a:pPr>
+            <a:r>
+              <a:t>  ✓ .env.example</a:t>
+            </a:r>
+          </a:p>
+          <a:p>
+            <a:pPr>
+              <a:spcAft>
+                <a:spcPts val="800"/>
+              </a:spcAft>
+              <a:defRPr sz="1900">
+                <a:solidFill>
+                  <a:srgbClr val="2C3E50"/>
+                </a:solidFill>
+              </a:defRPr>
+            </a:pPr>
+          </a:p>
+          <a:p>
+            <a:pPr>
+              <a:spcAft>
+                <a:spcPts val="800"/>
+              </a:spcAft>
+              <a:defRPr sz="1900">
+                <a:solidFill>
+                  <a:srgbClr val="2C3E50"/>
+                </a:solidFill>
+              </a:defRPr>
+            </a:pPr>
+            <a:r>
+              <a:t>Documentation (docs/):</a:t>
+            </a:r>
+          </a:p>
+          <a:p>
+            <a:pPr>
+              <a:spcAft>
+                <a:spcPts val="800"/>
+              </a:spcAft>
+              <a:defRPr sz="1900">
+                <a:solidFill>
+                  <a:srgbClr val="2C3E50"/>
+                </a:solidFill>
+              </a:defRPr>
+            </a:pPr>
+            <a:r>
+              <a:t>  ✓ api_documentation.pdf — Swagger export</a:t>
+            </a:r>
+          </a:p>
+          <a:p>
+            <a:pPr>
+              <a:spcAft>
+                <a:spcPts val="800"/>
+              </a:spcAft>
+              <a:defRPr sz="1900">
+                <a:solidFill>
+                  <a:srgbClr val="2C3E50"/>
+                </a:solidFill>
+              </a:defRPr>
+            </a:pPr>
+            <a:r>
+              <a:t>  ✓ TECHNICAL_REPORT.pdf — 5-page report</a:t>
+            </a:r>
+          </a:p>
+          <a:p>
+            <a:pPr>
+              <a:spcAft>
+                <a:spcPts val="800"/>
+              </a:spcAft>
+              <a:defRPr sz="1900">
+                <a:solidFill>
+                  <a:srgbClr val="2C3E50"/>
+                </a:solidFill>
+              </a:defRPr>
+            </a:pPr>
+            <a:r>
+              <a:t>  ✓ openapi.json — OpenAPI spec</a:t>
+            </a:r>
+          </a:p>
+        </p:txBody>
+      </p:sp>
+      <p:sp>
+        <p:nvSpPr>
+          <p:cNvPr id="4" name="TextBox 3"/>
+          <p:cNvSpPr txBox="1"/>
           <p:nvPr/>
         </p:nvSpPr>
         <p:spPr>
           <a:xfrm>
-            <a:off x="0" y="0"/>
-            <a:ext cx="9144000" cy="1097280"/>
-          </a:xfrm>
-          <a:prstGeom prst="rect">
-            <a:avLst/>
-          </a:prstGeom>
-          <a:solidFill>
-            <a:srgbClr val="0066CC"/>
-          </a:solidFill>
-          <a:ln>
-            <a:solidFill>
-              <a:srgbClr val="0066CC"/>
-            </a:solidFill>
-          </a:ln>
-        </p:spPr>
-        <p:style>
-          <a:lnRef idx="1">
-            <a:schemeClr val="accent1"/>
-          </a:lnRef>
-          <a:fillRef idx="3">
-            <a:schemeClr val="accent1"/>
-          </a:fillRef>
-          <a:effectRef idx="2">
-            <a:schemeClr val="accent1"/>
-          </a:effectRef>
-          <a:fontRef idx="minor">
-            <a:schemeClr val="lt1"/>
-          </a:fontRef>
-        </p:style>
-        <p:txBody>
-          <a:bodyPr rtlCol="0" anchor="ctr"/>
-          <a:lstStyle/>
-          <a:p>
-            <a:pPr algn="ctr">
-              <a:spcBef>
-                <a:spcPts val="1000"/>
-              </a:spcBef>
-              <a:spcAft>
-                <a:spcPts val="1000"/>
-              </a:spcAft>
-              <a:defRPr sz="4000" b="1">
-                <a:solidFill>
-                  <a:srgbClr val="FFFFFF"/>
-                </a:solidFill>
-              </a:defRPr>
-            </a:pPr>
-            <a:r>
-              <a:t>Security Features</a:t>
-            </a:r>
-          </a:p>
-        </p:txBody>
-      </p:sp>
-      <p:sp>
-        <p:nvSpPr>
-          <p:cNvPr id="3" name="TextBox 2"/>
-          <p:cNvSpPr txBox="1"/>
-          <p:nvPr/>
-        </p:nvSpPr>
-        <p:spPr>
-          <a:xfrm>
-            <a:off x="457200" y="1371600"/>
-            <a:ext cx="8229600" cy="5029200"/>
+            <a:off x="6217920" y="1463040"/>
+            <a:ext cx="5029200" cy="4572000"/>
           </a:xfrm>
           <a:prstGeom prst="rect">
             <a:avLst/>
@@ -5207,283 +7248,161 @@
           <a:lstStyle/>
           <a:p>
             <a:pPr>
-              <a:spcBef>
-                <a:spcPts val="800"/>
-              </a:spcBef>
-              <a:spcAft>
-                <a:spcPts val="800"/>
-              </a:spcAft>
-              <a:defRPr sz="1800">
-                <a:solidFill>
-                  <a:srgbClr val="333333"/>
-                </a:solidFill>
-              </a:defRPr>
-            </a:pPr>
-            <a:r>
-              <a:t>✅ Input Validation (Pydantic)</a:t>
-            </a:r>
-          </a:p>
-          <a:p>
-            <a:pPr>
-              <a:spcBef>
-                <a:spcPts val="800"/>
-              </a:spcBef>
-              <a:spcAft>
-                <a:spcPts val="800"/>
-              </a:spcAft>
-              <a:defRPr sz="1800">
-                <a:solidFill>
-                  <a:srgbClr val="333333"/>
-                </a:solidFill>
-              </a:defRPr>
-            </a:pPr>
-            <a:r>
-              <a:t>✅ SQL Injection Prevention (Parameterized queries)</a:t>
-            </a:r>
-          </a:p>
-          <a:p>
-            <a:pPr>
-              <a:spcBef>
-                <a:spcPts val="800"/>
-              </a:spcBef>
-              <a:spcAft>
-                <a:spcPts val="800"/>
-              </a:spcAft>
-              <a:defRPr sz="1800">
-                <a:solidFill>
-                  <a:srgbClr val="333333"/>
-                </a:solidFill>
-              </a:defRPr>
-            </a:pPr>
-            <a:r>
-              <a:t>✅ CORS Configuration</a:t>
-            </a:r>
-          </a:p>
-          <a:p>
-            <a:pPr>
-              <a:spcBef>
-                <a:spcPts val="800"/>
-              </a:spcBef>
-              <a:spcAft>
-                <a:spcPts val="800"/>
-              </a:spcAft>
-              <a:defRPr sz="1800">
-                <a:solidFill>
-                  <a:srgbClr val="333333"/>
-                </a:solidFill>
-              </a:defRPr>
-            </a:pPr>
-            <a:r>
-              <a:t>✅ Global Error Handling</a:t>
-            </a:r>
-          </a:p>
-          <a:p>
-            <a:pPr>
-              <a:spcBef>
-                <a:spcPts val="800"/>
-              </a:spcBef>
-              <a:spcAft>
-                <a:spcPts val="800"/>
-              </a:spcAft>
-              <a:defRPr sz="1800">
-                <a:solidFill>
-                  <a:srgbClr val="333333"/>
-                </a:solidFill>
-              </a:defRPr>
-            </a:pPr>
-            <a:r>
-              <a:t>✅ Future: JWT Auth, Rate Limiting</a:t>
-            </a:r>
-          </a:p>
-        </p:txBody>
-      </p:sp>
-    </p:spTree>
-  </p:cSld>
-  <p:clrMapOvr>
-    <a:masterClrMapping/>
-  </p:clrMapOvr>
-</p:sld>
-</file>
-
-<file path=ppt/slides/slide9.xml><?xml version="1.0" encoding="utf-8"?>
-<p:sld xmlns:a="http://schemas.openxmlformats.org/drawingml/2006/main" xmlns:p="http://schemas.openxmlformats.org/presentationml/2006/main" xmlns:r="http://schemas.openxmlformats.org/officeDocument/2006/relationships">
-  <p:cSld>
-    <p:spTree>
-      <p:nvGrpSpPr>
-        <p:cNvPr id="1" name=""/>
-        <p:cNvGrpSpPr/>
-        <p:nvPr/>
-      </p:nvGrpSpPr>
-      <p:grpSpPr/>
-      <p:sp>
-        <p:nvSpPr>
-          <p:cNvPr id="2" name="Rectangle 1"/>
-          <p:cNvSpPr/>
-          <p:nvPr/>
-        </p:nvSpPr>
-        <p:spPr>
-          <a:xfrm>
-            <a:off x="0" y="0"/>
-            <a:ext cx="9144000" cy="1097280"/>
-          </a:xfrm>
-          <a:prstGeom prst="rect">
-            <a:avLst/>
-          </a:prstGeom>
-          <a:solidFill>
-            <a:srgbClr val="0066CC"/>
-          </a:solidFill>
-          <a:ln>
-            <a:solidFill>
-              <a:srgbClr val="0066CC"/>
-            </a:solidFill>
-          </a:ln>
-        </p:spPr>
-        <p:style>
-          <a:lnRef idx="1">
-            <a:schemeClr val="accent1"/>
-          </a:lnRef>
-          <a:fillRef idx="3">
-            <a:schemeClr val="accent1"/>
-          </a:fillRef>
-          <a:effectRef idx="2">
-            <a:schemeClr val="accent1"/>
-          </a:effectRef>
-          <a:fontRef idx="minor">
-            <a:schemeClr val="lt1"/>
-          </a:fontRef>
-        </p:style>
-        <p:txBody>
-          <a:bodyPr rtlCol="0" anchor="ctr"/>
-          <a:lstStyle/>
-          <a:p>
-            <a:pPr algn="ctr">
-              <a:spcBef>
-                <a:spcPts val="1000"/>
-              </a:spcBef>
-              <a:spcAft>
-                <a:spcPts val="1000"/>
-              </a:spcAft>
-              <a:defRPr sz="4000" b="1">
-                <a:solidFill>
-                  <a:srgbClr val="FFFFFF"/>
-                </a:solidFill>
-              </a:defRPr>
-            </a:pPr>
-            <a:r>
-              <a:t>Testing (10/10 PASSED)</a:t>
-            </a:r>
-          </a:p>
-        </p:txBody>
-      </p:sp>
-      <p:sp>
-        <p:nvSpPr>
-          <p:cNvPr id="3" name="TextBox 2"/>
-          <p:cNvSpPr txBox="1"/>
-          <p:nvPr/>
-        </p:nvSpPr>
-        <p:spPr>
-          <a:xfrm>
-            <a:off x="457200" y="1371600"/>
-            <a:ext cx="8229600" cy="5029200"/>
-          </a:xfrm>
-          <a:prstGeom prst="rect">
-            <a:avLst/>
-          </a:prstGeom>
-          <a:noFill/>
-        </p:spPr>
-        <p:txBody>
-          <a:bodyPr wrap="square">
-            <a:spAutoFit/>
-          </a:bodyPr>
-          <a:lstStyle/>
-          <a:p>
-            <a:pPr>
-              <a:spcBef>
-                <a:spcPts val="800"/>
-              </a:spcBef>
-              <a:spcAft>
-                <a:spcPts val="800"/>
-              </a:spcAft>
-              <a:defRPr sz="1800">
-                <a:solidFill>
-                  <a:srgbClr val="333333"/>
-                </a:solidFill>
-              </a:defRPr>
-            </a:pPr>
-            <a:r>
-              <a:t>✓ 3 CRUD operation tests</a:t>
-            </a:r>
-          </a:p>
-          <a:p>
-            <a:pPr>
-              <a:spcBef>
-                <a:spcPts val="800"/>
-              </a:spcBef>
-              <a:spcAft>
-                <a:spcPts val="800"/>
-              </a:spcAft>
-              <a:defRPr sz="1800">
-                <a:solidFill>
-                  <a:srgbClr val="333333"/>
-                </a:solidFill>
-              </a:defRPr>
-            </a:pPr>
-            <a:r>
-              <a:t>✓ 3 Validation tests</a:t>
-            </a:r>
-          </a:p>
-          <a:p>
-            <a:pPr>
-              <a:spcBef>
-                <a:spcPts val="800"/>
-              </a:spcBef>
-              <a:spcAft>
-                <a:spcPts val="800"/>
-              </a:spcAft>
-              <a:defRPr sz="1800">
-                <a:solidFill>
-                  <a:srgbClr val="333333"/>
-                </a:solidFill>
-              </a:defRPr>
-            </a:pPr>
-            <a:r>
-              <a:t>✓ 2 Analytics tests</a:t>
-            </a:r>
-          </a:p>
-          <a:p>
-            <a:pPr>
-              <a:spcBef>
-                <a:spcPts val="800"/>
-              </a:spcBef>
-              <a:spcAft>
-                <a:spcPts val="800"/>
-              </a:spcAft>
-              <a:defRPr sz="1800">
-                <a:solidFill>
-                  <a:srgbClr val="333333"/>
-                </a:solidFill>
-              </a:defRPr>
-            </a:pPr>
-            <a:r>
-              <a:t>✓ 2 Error handling tests</a:t>
-            </a:r>
-          </a:p>
-          <a:p>
-            <a:pPr>
-              <a:spcBef>
-                <a:spcPts val="800"/>
-              </a:spcBef>
-              <a:spcAft>
-                <a:spcPts val="800"/>
-              </a:spcAft>
-              <a:defRPr sz="1800">
-                <a:solidFill>
-                  <a:srgbClr val="333333"/>
-                </a:solidFill>
-              </a:defRPr>
-            </a:pPr>
-            <a:r>
-              <a:t>✓ 100% passing rate</a:t>
+              <a:spcAft>
+                <a:spcPts val="800"/>
+              </a:spcAft>
+              <a:defRPr sz="1900">
+                <a:solidFill>
+                  <a:srgbClr val="2C3E50"/>
+                </a:solidFill>
+              </a:defRPr>
+            </a:pPr>
+            <a:r>
+              <a:t>GenAI Evidence (docs/):</a:t>
+            </a:r>
+          </a:p>
+          <a:p>
+            <a:pPr>
+              <a:spcAft>
+                <a:spcPts val="800"/>
+              </a:spcAft>
+              <a:defRPr sz="1900">
+                <a:solidFill>
+                  <a:srgbClr val="2C3E50"/>
+                </a:solidFill>
+              </a:defRPr>
+            </a:pPr>
+            <a:r>
+              <a:t>  ✓ GENAI_DECLARATION.md + .pdf</a:t>
+            </a:r>
+          </a:p>
+          <a:p>
+            <a:pPr>
+              <a:spcAft>
+                <a:spcPts val="800"/>
+              </a:spcAft>
+              <a:defRPr sz="1900">
+                <a:solidFill>
+                  <a:srgbClr val="2C3E50"/>
+                </a:solidFill>
+              </a:defRPr>
+            </a:pPr>
+            <a:r>
+              <a:t>  ✓ GENAI_CONVERSATION_LOGS.md</a:t>
+            </a:r>
+          </a:p>
+          <a:p>
+            <a:pPr>
+              <a:spcAft>
+                <a:spcPts val="800"/>
+              </a:spcAft>
+              <a:defRPr sz="1900">
+                <a:solidFill>
+                  <a:srgbClr val="2C3E50"/>
+                </a:solidFill>
+              </a:defRPr>
+            </a:pPr>
+            <a:r>
+              <a:t>     (3 ChatGPT + 3 Copilot examples)</a:t>
+            </a:r>
+          </a:p>
+          <a:p>
+            <a:pPr>
+              <a:spcAft>
+                <a:spcPts val="800"/>
+              </a:spcAft>
+              <a:defRPr sz="1900">
+                <a:solidFill>
+                  <a:srgbClr val="2C3E50"/>
+                </a:solidFill>
+              </a:defRPr>
+            </a:pPr>
+          </a:p>
+          <a:p>
+            <a:pPr>
+              <a:spcAft>
+                <a:spcPts val="800"/>
+              </a:spcAft>
+              <a:defRPr sz="1900">
+                <a:solidFill>
+                  <a:srgbClr val="2C3E50"/>
+                </a:solidFill>
+              </a:defRPr>
+            </a:pPr>
+            <a:r>
+              <a:t>Presentation:</a:t>
+            </a:r>
+          </a:p>
+          <a:p>
+            <a:pPr>
+              <a:spcAft>
+                <a:spcPts val="800"/>
+              </a:spcAft>
+              <a:defRPr sz="1900">
+                <a:solidFill>
+                  <a:srgbClr val="2C3E50"/>
+                </a:solidFill>
+              </a:defRPr>
+            </a:pPr>
+            <a:r>
+              <a:t>  ✓ docs/PRESENTATION.pptx — this deck</a:t>
+            </a:r>
+          </a:p>
+          <a:p>
+            <a:pPr>
+              <a:spcAft>
+                <a:spcPts val="800"/>
+              </a:spcAft>
+              <a:defRPr sz="1900">
+                <a:solidFill>
+                  <a:srgbClr val="2C3E50"/>
+                </a:solidFill>
+              </a:defRPr>
+            </a:pPr>
+          </a:p>
+          <a:p>
+            <a:pPr>
+              <a:spcAft>
+                <a:spcPts val="800"/>
+              </a:spcAft>
+              <a:defRPr sz="1900">
+                <a:solidFill>
+                  <a:srgbClr val="2C3E50"/>
+                </a:solidFill>
+              </a:defRPr>
+            </a:pPr>
+            <a:r>
+              <a:t>Deployment:</a:t>
+            </a:r>
+          </a:p>
+          <a:p>
+            <a:pPr>
+              <a:spcAft>
+                <a:spcPts val="800"/>
+              </a:spcAft>
+              <a:defRPr sz="1900">
+                <a:solidFill>
+                  <a:srgbClr val="2C3E50"/>
+                </a:solidFill>
+              </a:defRPr>
+            </a:pPr>
+            <a:r>
+              <a:t>  ✓ Live on Render with verified endpoints</a:t>
+            </a:r>
+          </a:p>
+          <a:p>
+            <a:pPr>
+              <a:spcAft>
+                <a:spcPts val="800"/>
+              </a:spcAft>
+              <a:defRPr sz="1900">
+                <a:solidFill>
+                  <a:srgbClr val="2C3E50"/>
+                </a:solidFill>
+              </a:defRPr>
+            </a:pPr>
+            <a:r>
+              <a:t>  ✓ /ui/ web dashboard accessible</a:t>
             </a:r>
           </a:p>
         </p:txBody>
@@ -5814,4 +7733,324 @@
   </a:objectDefaults>
   <a:extraClrSchemeLst/>
 </a:theme>
+</file>
+
+<file path=ppt/theme/theme2.xml><?xml version="1.0" encoding="utf-8"?>
+<a:theme xmlns:a="http://schemas.openxmlformats.org/drawingml/2006/main" name="Office Theme">
+  <a:themeElements>
+    <a:clrScheme name="Office">
+      <a:dk1>
+        <a:sysClr val="windowText" lastClr="000000"/>
+      </a:dk1>
+      <a:lt1>
+        <a:sysClr val="window" lastClr="FFFFFF"/>
+      </a:lt1>
+      <a:dk2>
+        <a:srgbClr val="1F497D"/>
+      </a:dk2>
+      <a:lt2>
+        <a:srgbClr val="EEECE1"/>
+      </a:lt2>
+      <a:accent1>
+        <a:srgbClr val="4F81BD"/>
+      </a:accent1>
+      <a:accent2>
+        <a:srgbClr val="C0504D"/>
+      </a:accent2>
+      <a:accent3>
+        <a:srgbClr val="9BBB59"/>
+      </a:accent3>
+      <a:accent4>
+        <a:srgbClr val="8064A2"/>
+      </a:accent4>
+      <a:accent5>
+        <a:srgbClr val="4BACC6"/>
+      </a:accent5>
+      <a:accent6>
+        <a:srgbClr val="F79646"/>
+      </a:accent6>
+      <a:hlink>
+        <a:srgbClr val="0000FF"/>
+      </a:hlink>
+      <a:folHlink>
+        <a:srgbClr val="800080"/>
+      </a:folHlink>
+    </a:clrScheme>
+    <a:fontScheme name="Office">
+      <a:majorFont>
+        <a:latin typeface="Calibri"/>
+        <a:ea typeface=""/>
+        <a:cs typeface=""/>
+        <a:font script="Jpan" typeface="ＭＳ Ｐゴシック"/>
+        <a:font script="Hang" typeface="맑은 고딕"/>
+        <a:font script="Hans" typeface="宋体"/>
+        <a:font script="Hant" typeface="新細明體"/>
+        <a:font script="Arab" typeface="Times New Roman"/>
+        <a:font script="Hebr" typeface="Times New Roman"/>
+        <a:font script="Thai" typeface="Angsana New"/>
+        <a:font script="Ethi" typeface="Nyala"/>
+        <a:font script="Beng" typeface="Vrinda"/>
+        <a:font script="Gujr" typeface="Shruti"/>
+        <a:font script="Khmr" typeface="MoolBoran"/>
+        <a:font script="Knda" typeface="Tunga"/>
+        <a:font script="Guru" typeface="Raavi"/>
+        <a:font script="Cans" typeface="Euphemia"/>
+        <a:font script="Cher" typeface="Plantagenet Cherokee"/>
+        <a:font script="Yiii" typeface="Microsoft Yi Baiti"/>
+        <a:font script="Tibt" typeface="Microsoft Himalaya"/>
+        <a:font script="Thaa" typeface="MV Boli"/>
+        <a:font script="Deva" typeface="Mangal"/>
+        <a:font script="Telu" typeface="Gautami"/>
+        <a:font script="Taml" typeface="Latha"/>
+        <a:font script="Syrc" typeface="Estrangelo Edessa"/>
+        <a:font script="Orya" typeface="Kalinga"/>
+        <a:font script="Mlym" typeface="Kartika"/>
+        <a:font script="Laoo" typeface="DokChampa"/>
+        <a:font script="Sinh" typeface="Iskoola Pota"/>
+        <a:font script="Mong" typeface="Mongolian Baiti"/>
+        <a:font script="Viet" typeface="Times New Roman"/>
+        <a:font script="Uigh" typeface="Microsoft Uighur"/>
+        <a:font script="Geor" typeface="Sylfaen"/>
+      </a:majorFont>
+      <a:minorFont>
+        <a:latin typeface="Calibri"/>
+        <a:ea typeface=""/>
+        <a:cs typeface=""/>
+        <a:font script="Jpan" typeface="ＭＳ Ｐゴシック"/>
+        <a:font script="Hang" typeface="맑은 고딕"/>
+        <a:font script="Hans" typeface="宋体"/>
+        <a:font script="Hant" typeface="新細明體"/>
+        <a:font script="Arab" typeface="Arial"/>
+        <a:font script="Hebr" typeface="Arial"/>
+        <a:font script="Thai" typeface="Cordia New"/>
+        <a:font script="Ethi" typeface="Nyala"/>
+        <a:font script="Beng" typeface="Vrinda"/>
+        <a:font script="Gujr" typeface="Shruti"/>
+        <a:font script="Khmr" typeface="DaunPenh"/>
+        <a:font script="Knda" typeface="Tunga"/>
+        <a:font script="Guru" typeface="Raavi"/>
+        <a:font script="Cans" typeface="Euphemia"/>
+        <a:font script="Cher" typeface="Plantagenet Cherokee"/>
+        <a:font script="Yiii" typeface="Microsoft Yi Baiti"/>
+        <a:font script="Tibt" typeface="Microsoft Himalaya"/>
+        <a:font script="Thaa" typeface="MV Boli"/>
+        <a:font script="Deva" typeface="Mangal"/>
+        <a:font script="Telu" typeface="Gautami"/>
+        <a:font script="Taml" typeface="Latha"/>
+        <a:font script="Syrc" typeface="Estrangelo Edessa"/>
+        <a:font script="Orya" typeface="Kalinga"/>
+        <a:font script="Mlym" typeface="Kartika"/>
+        <a:font script="Laoo" typeface="DokChampa"/>
+        <a:font script="Sinh" typeface="Iskoola Pota"/>
+        <a:font script="Mong" typeface="Mongolian Baiti"/>
+        <a:font script="Viet" typeface="Arial"/>
+        <a:font script="Uigh" typeface="Microsoft Uighur"/>
+        <a:font script="Geor" typeface="Sylfaen"/>
+      </a:minorFont>
+    </a:fontScheme>
+    <a:fmtScheme name="Office">
+      <a:fillStyleLst>
+        <a:solidFill>
+          <a:schemeClr val="phClr"/>
+        </a:solidFill>
+        <a:gradFill rotWithShape="1">
+          <a:gsLst>
+            <a:gs pos="0">
+              <a:schemeClr val="phClr">
+                <a:tint val="50000"/>
+                <a:satMod val="300000"/>
+              </a:schemeClr>
+            </a:gs>
+            <a:gs pos="35000">
+              <a:schemeClr val="phClr">
+                <a:tint val="37000"/>
+                <a:satMod val="300000"/>
+              </a:schemeClr>
+            </a:gs>
+            <a:gs pos="100000">
+              <a:schemeClr val="phClr">
+                <a:tint val="15000"/>
+                <a:satMod val="350000"/>
+              </a:schemeClr>
+            </a:gs>
+          </a:gsLst>
+          <a:lin ang="16200000" scaled="1"/>
+        </a:gradFill>
+        <a:gradFill rotWithShape="1">
+          <a:gsLst>
+            <a:gs pos="0">
+              <a:schemeClr val="phClr">
+                <a:tint val="100000"/>
+                <a:shade val="100000"/>
+                <a:satMod val="130000"/>
+              </a:schemeClr>
+            </a:gs>
+            <a:gs pos="100000">
+              <a:schemeClr val="phClr">
+                <a:tint val="50000"/>
+                <a:shade val="100000"/>
+                <a:satMod val="350000"/>
+              </a:schemeClr>
+            </a:gs>
+          </a:gsLst>
+          <a:lin ang="16200000" scaled="0"/>
+        </a:gradFill>
+      </a:fillStyleLst>
+      <a:lnStyleLst>
+        <a:ln w="9525" cap="flat" cmpd="sng" algn="ctr">
+          <a:solidFill>
+            <a:schemeClr val="phClr">
+              <a:shade val="95000"/>
+              <a:satMod val="105000"/>
+            </a:schemeClr>
+          </a:solidFill>
+          <a:prstDash val="solid"/>
+        </a:ln>
+        <a:ln w="25400" cap="flat" cmpd="sng" algn="ctr">
+          <a:solidFill>
+            <a:schemeClr val="phClr"/>
+          </a:solidFill>
+          <a:prstDash val="solid"/>
+        </a:ln>
+        <a:ln w="38100" cap="flat" cmpd="sng" algn="ctr">
+          <a:solidFill>
+            <a:schemeClr val="phClr"/>
+          </a:solidFill>
+          <a:prstDash val="solid"/>
+        </a:ln>
+      </a:lnStyleLst>
+      <a:effectStyleLst>
+        <a:effectStyle>
+          <a:effectLst>
+            <a:outerShdw blurRad="40000" dist="20000" dir="5400000" rotWithShape="0">
+              <a:srgbClr val="000000">
+                <a:alpha val="38000"/>
+              </a:srgbClr>
+            </a:outerShdw>
+          </a:effectLst>
+        </a:effectStyle>
+        <a:effectStyle>
+          <a:effectLst>
+            <a:outerShdw blurRad="40000" dist="23000" dir="5400000" rotWithShape="0">
+              <a:srgbClr val="000000">
+                <a:alpha val="35000"/>
+              </a:srgbClr>
+            </a:outerShdw>
+          </a:effectLst>
+        </a:effectStyle>
+        <a:effectStyle>
+          <a:effectLst>
+            <a:outerShdw blurRad="40000" dist="23000" dir="5400000" rotWithShape="0">
+              <a:srgbClr val="000000">
+                <a:alpha val="35000"/>
+              </a:srgbClr>
+            </a:outerShdw>
+          </a:effectLst>
+          <a:scene3d>
+            <a:camera prst="orthographicFront">
+              <a:rot lat="0" lon="0" rev="0"/>
+            </a:camera>
+            <a:lightRig rig="threePt" dir="t">
+              <a:rot lat="0" lon="0" rev="1200000"/>
+            </a:lightRig>
+          </a:scene3d>
+          <a:sp3d>
+            <a:bevelT w="63500" h="25400"/>
+          </a:sp3d>
+        </a:effectStyle>
+      </a:effectStyleLst>
+      <a:bgFillStyleLst>
+        <a:solidFill>
+          <a:schemeClr val="phClr"/>
+        </a:solidFill>
+        <a:gradFill rotWithShape="1">
+          <a:gsLst>
+            <a:gs pos="0">
+              <a:schemeClr val="phClr">
+                <a:tint val="40000"/>
+                <a:satMod val="350000"/>
+              </a:schemeClr>
+            </a:gs>
+            <a:gs pos="40000">
+              <a:schemeClr val="phClr">
+                <a:tint val="45000"/>
+                <a:shade val="99000"/>
+                <a:satMod val="350000"/>
+              </a:schemeClr>
+            </a:gs>
+            <a:gs pos="100000">
+              <a:schemeClr val="phClr">
+                <a:shade val="20000"/>
+                <a:satMod val="255000"/>
+              </a:schemeClr>
+            </a:gs>
+          </a:gsLst>
+          <a:path path="circle">
+            <a:fillToRect l="50000" t="-80000" r="50000" b="180000"/>
+          </a:path>
+        </a:gradFill>
+        <a:gradFill rotWithShape="1">
+          <a:gsLst>
+            <a:gs pos="0">
+              <a:schemeClr val="phClr">
+                <a:tint val="80000"/>
+                <a:satMod val="300000"/>
+              </a:schemeClr>
+            </a:gs>
+            <a:gs pos="100000">
+              <a:schemeClr val="phClr">
+                <a:shade val="30000"/>
+                <a:satMod val="200000"/>
+              </a:schemeClr>
+            </a:gs>
+          </a:gsLst>
+          <a:path path="circle">
+            <a:fillToRect l="50000" t="50000" r="50000" b="50000"/>
+          </a:path>
+        </a:gradFill>
+      </a:bgFillStyleLst>
+    </a:fmtScheme>
+  </a:themeElements>
+  <a:objectDefaults>
+    <a:spDef>
+      <a:spPr/>
+      <a:bodyPr/>
+      <a:lstStyle/>
+      <a:style>
+        <a:lnRef idx="1">
+          <a:schemeClr val="accent1"/>
+        </a:lnRef>
+        <a:fillRef idx="3">
+          <a:schemeClr val="accent1"/>
+        </a:fillRef>
+        <a:effectRef idx="2">
+          <a:schemeClr val="accent1"/>
+        </a:effectRef>
+        <a:fontRef idx="minor">
+          <a:schemeClr val="lt1"/>
+        </a:fontRef>
+      </a:style>
+    </a:spDef>
+    <a:lnDef>
+      <a:spPr/>
+      <a:bodyPr/>
+      <a:lstStyle/>
+      <a:style>
+        <a:lnRef idx="2">
+          <a:schemeClr val="accent1"/>
+        </a:lnRef>
+        <a:fillRef idx="0">
+          <a:schemeClr val="accent1"/>
+        </a:fillRef>
+        <a:effectRef idx="1">
+          <a:schemeClr val="accent1"/>
+        </a:effectRef>
+        <a:fontRef idx="minor">
+          <a:schemeClr val="tx1"/>
+        </a:fontRef>
+      </a:style>
+    </a:lnDef>
+  </a:objectDefaults>
+  <a:extraClrSchemeLst/>
+</a:theme>
 </file>
--- a/docs/PRESENTATION.pptx
+++ b/docs/PRESENTATION.pptx
@@ -4834,7 +4834,7 @@
               </a:defRPr>
             </a:pPr>
             <a:r>
-              <a:t>[Screenshot placeholder: architecture diagram]</a:t>
+              <a:t>FastAPI → SQLAlchemy ORM → SQLite · X-API-Key middleware · /docs auto-generated · /ui/ served from /static</a:t>
             </a:r>
           </a:p>
         </p:txBody>
@@ -6252,7 +6252,7 @@
               </a:defRPr>
             </a:pPr>
             <a:r>
-              <a:t>[Screenshot placeholder: pytest -v output]</a:t>
+              <a:t>All 14 tests passing (pytest -v): 4 auth · 3 habits CRUD · 7 logs &amp; analytics — 0 failures</a:t>
             </a:r>
           </a:p>
         </p:txBody>
@@ -6557,7 +6557,7 @@
               </a:defRPr>
             </a:pPr>
             <a:r>
-              <a:t>[Screenshot placeholder: git log --oneline terminal output]</a:t>
+              <a:t>49 commits on main — conventional commit messages (feat / fix / docs / test / chore)</a:t>
             </a:r>
           </a:p>
         </p:txBody>
@@ -6972,7 +6972,7 @@
               </a:defRPr>
             </a:pPr>
             <a:r>
-              <a:t>[Screenshot placeholder: Render dashboard / /habits 200]</a:t>
+              <a:t>Live on Render — /health 200 ✓  /docs 200 ✓  /api/habits 200 ✓  /ui/ 200 ✓</a:t>
             </a:r>
           </a:p>
         </p:txBody>

--- a/docs/PRESENTATION.pptx
+++ b/docs/PRESENTATION.pptx
@@ -3111,8 +3111,8 @@
         </p:nvSpPr>
         <p:spPr>
           <a:xfrm>
-            <a:off x="457200" y="1828800"/>
-            <a:ext cx="8229600" cy="1371600"/>
+            <a:off x="457200" y="914400"/>
+            <a:ext cx="8229600" cy="2286000"/>
           </a:xfrm>
           <a:prstGeom prst="rect">
             <a:avLst/>
@@ -3121,23 +3121,61 @@
         </p:spPr>
         <p:txBody>
           <a:bodyPr wrap="square">
-            <a:spAutoFit/>
+            <a:noAutofit/>
           </a:bodyPr>
           <a:lstStyle/>
           <a:p>
             <a:pPr algn="ctr">
-              <a:defRPr sz="5400" b="1">
+              <a:spcBef>
+                <a:spcPts val="0"/>
+              </a:spcBef>
+              <a:spcAft>
+                <a:spcPts val="0"/>
+              </a:spcAft>
+            </a:pPr>
+            <a:r>
+              <a:rPr sz="4000" b="1">
                 <a:solidFill>
                   <a:srgbClr val="F5F5F5"/>
                 </a:solidFill>
-              </a:defRPr>
-            </a:pPr>
-            <a:r>
+              </a:rPr>
               <a:t>COMP3011:</a:t>
             </a:r>
-            <a:br/>
-            <a:r>
-              <a:t>Habit &amp; Productivity Analytics API</a:t>
+          </a:p>
+          <a:p>
+            <a:pPr algn="ctr">
+              <a:spcBef>
+                <a:spcPts val="400"/>
+              </a:spcBef>
+              <a:spcAft>
+                <a:spcPts val="0"/>
+              </a:spcAft>
+            </a:pPr>
+            <a:r>
+              <a:rPr sz="4000" b="1">
+                <a:solidFill>
+                  <a:srgbClr val="F5F5F5"/>
+                </a:solidFill>
+              </a:rPr>
+              <a:t>Habit &amp; Productivity</a:t>
+            </a:r>
+          </a:p>
+          <a:p>
+            <a:pPr algn="ctr">
+              <a:spcBef>
+                <a:spcPts val="400"/>
+              </a:spcBef>
+              <a:spcAft>
+                <a:spcPts val="0"/>
+              </a:spcAft>
+            </a:pPr>
+            <a:r>
+              <a:rPr sz="4000" b="1">
+                <a:solidFill>
+                  <a:srgbClr val="F5F5F5"/>
+                </a:solidFill>
+              </a:rPr>
+              <a:t>Analytics API</a:t>
             </a:r>
           </a:p>
         </p:txBody>
@@ -3150,8 +3188,8 @@
         </p:nvSpPr>
         <p:spPr>
           <a:xfrm>
-            <a:off x="457200" y="3474720"/>
-            <a:ext cx="8229600" cy="914400"/>
+            <a:off x="914400" y="3429000"/>
+            <a:ext cx="7315200" cy="914400"/>
           </a:xfrm>
           <a:prstGeom prst="rect">
             <a:avLst/>
@@ -3160,19 +3198,18 @@
         </p:spPr>
         <p:txBody>
           <a:bodyPr wrap="square">
-            <a:spAutoFit/>
+            <a:noAutofit/>
           </a:bodyPr>
           <a:lstStyle/>
           <a:p>
-            <a:pPr algn="ctr">
-              <a:defRPr sz="2400">
-                <a:solidFill>
-                  <a:srgbClr val="BFBFBF"/>
-                </a:solidFill>
-              </a:defRPr>
-            </a:pPr>
-            <a:r>
-              <a:t>Building a modern data-driven system for habit tracking and analytics</a:t>
+            <a:pPr algn="ctr"/>
+            <a:r>
+              <a:rPr sz="1800" b="0">
+                <a:solidFill>
+                  <a:srgbClr val="A0A0A0"/>
+                </a:solidFill>
+              </a:rPr>
+              <a:t>Building a modern data-driven system for habit tracking and productivity analytics</a:t>
             </a:r>
           </a:p>
         </p:txBody>
@@ -3185,7 +3222,7 @@
         </p:nvSpPr>
         <p:spPr>
           <a:xfrm>
-            <a:off x="2743200" y="4754880"/>
+            <a:off x="2743200" y="4663440"/>
             <a:ext cx="3657600" cy="137160"/>
           </a:xfrm>
           <a:prstGeom prst="roundRect">
@@ -5332,7 +5369,7 @@
               </a:defRPr>
             </a:pPr>
             <a:r>
-              <a:t>14</a:t>
+              <a:t>14/14 tests passing</a:t>
             </a:r>
           </a:p>
         </p:txBody>
@@ -6863,7 +6900,7 @@
               </a:defRPr>
             </a:pPr>
             <a:r>
-              <a:t>Simple API. Real Impact.</a:t>
+              <a:t>Deliverables &amp; Resources</a:t>
             </a:r>
           </a:p>
         </p:txBody>
@@ -6876,8 +6913,8 @@
         </p:nvSpPr>
         <p:spPr>
           <a:xfrm>
-            <a:off x="914400" y="2651760"/>
-            <a:ext cx="7315200" cy="1371600"/>
+            <a:off x="1371600" y="3017520"/>
+            <a:ext cx="6400800" cy="2743200"/>
           </a:xfrm>
           <a:prstGeom prst="rect">
             <a:avLst/>
@@ -6890,113 +6927,73 @@
           </a:bodyPr>
           <a:lstStyle/>
           <a:p>
-            <a:pPr algn="ctr">
-              <a:spcAft>
-                <a:spcPts val="800"/>
-              </a:spcAft>
-              <a:defRPr sz="1800">
-                <a:solidFill>
-                  <a:srgbClr val="BFBFBF"/>
-                </a:solidFill>
-              </a:defRPr>
-            </a:pPr>
-            <a:r>
-              <a:t>A complete, production-ready system for habit tracking and analytics.</a:t>
-            </a:r>
-          </a:p>
-          <a:p>
-            <a:pPr algn="ctr">
-              <a:defRPr sz="1600">
-                <a:solidFill>
-                  <a:srgbClr val="BFBFBF"/>
-                </a:solidFill>
-              </a:defRPr>
-            </a:pPr>
-            <a:r>
-              <a:t>Deployed on Render. Fully tested. Documented. Ready.</a:t>
-            </a:r>
-          </a:p>
-        </p:txBody>
-      </p:sp>
-      <p:sp>
-        <p:nvSpPr>
-          <p:cNvPr id="4" name="TextBox 3"/>
-          <p:cNvSpPr txBox="1"/>
-          <p:nvPr/>
-        </p:nvSpPr>
-        <p:spPr>
-          <a:xfrm>
-            <a:off x="914400" y="4389120"/>
-            <a:ext cx="7315200" cy="1828800"/>
-          </a:xfrm>
-          <a:prstGeom prst="rect">
-            <a:avLst/>
-          </a:prstGeom>
-          <a:noFill/>
-        </p:spPr>
-        <p:txBody>
-          <a:bodyPr wrap="square">
-            <a:spAutoFit/>
-          </a:bodyPr>
-          <a:lstStyle/>
-          <a:p>
-            <a:pPr algn="ctr">
+            <a:pPr algn="l">
+              <a:spcBef>
+                <a:spcPts val="0"/>
+              </a:spcBef>
               <a:spcAft>
                 <a:spcPts val="600"/>
               </a:spcAft>
-              <a:defRPr sz="1400" b="1">
-                <a:solidFill>
-                  <a:srgbClr val="06B6D4"/>
-                </a:solidFill>
-              </a:defRPr>
-            </a:pPr>
-            <a:r>
-              <a:t>Resources:</a:t>
-            </a:r>
-          </a:p>
-          <a:p>
-            <a:pPr algn="ctr">
+              <a:defRPr sz="1800">
+                <a:solidFill>
+                  <a:srgbClr val="BFBFBF"/>
+                </a:solidFill>
+              </a:defRPr>
+            </a:pPr>
+            <a:r>
+              <a:t>•  Technical Report (PDF)</a:t>
+            </a:r>
+          </a:p>
+          <a:p>
+            <a:pPr algn="l">
               <a:spcBef>
-                <a:spcPts val="300"/>
+                <a:spcPts val="600"/>
               </a:spcBef>
-              <a:defRPr sz="1100">
-                <a:solidFill>
-                  <a:srgbClr val="F5F5F5"/>
-                </a:solidFill>
-              </a:defRPr>
-            </a:pPr>
-            <a:r>
-              <a:t>📖 Technical Report (5 pages detailed)</a:t>
-            </a:r>
-          </a:p>
-          <a:p>
-            <a:pPr algn="ctr">
+              <a:spcAft>
+                <a:spcPts val="600"/>
+              </a:spcAft>
+            </a:pPr>
+            <a:r>
+              <a:t>•  API Documentation (PDF)</a:t>
+            </a:r>
+          </a:p>
+          <a:p>
+            <a:pPr algn="l">
               <a:spcBef>
-                <a:spcPts val="300"/>
+                <a:spcPts val="600"/>
               </a:spcBef>
-              <a:defRPr sz="1100">
-                <a:solidFill>
-                  <a:srgbClr val="F5F5F5"/>
-                </a:solidFill>
-              </a:defRPr>
-            </a:pPr>
-            <a:r>
-              <a:t>📝 API Documentation (Swagger)</a:t>
-            </a:r>
-          </a:p>
-          <a:p>
-            <a:pPr algn="ctr">
+              <a:spcAft>
+                <a:spcPts val="600"/>
+              </a:spcAft>
+            </a:pPr>
+            <a:r>
+              <a:t>•  Presentation Slides (PPTX)</a:t>
+            </a:r>
+          </a:p>
+          <a:p>
+            <a:pPr algn="l">
               <a:spcBef>
-                <a:spcPts val="300"/>
+                <a:spcPts val="600"/>
               </a:spcBef>
-              <a:defRPr sz="1100">
-                <a:solidFill>
-                  <a:srgbClr val="F5F5F5"/>
-                </a:solidFill>
-              </a:defRPr>
-            </a:pPr>
-            <a:r>
-              <a:t>💾 Source: github.com/NicolasIssa1/COMP3011-CW1-HABIT-API</a:t>
+              <a:spcAft>
+                <a:spcPts val="600"/>
+              </a:spcAft>
+            </a:pPr>
+            <a:r>
+              <a:t>•  Public GitHub Repository</a:t>
+            </a:r>
+          </a:p>
+          <a:p>
+            <a:pPr algn="l">
+              <a:spcBef>
+                <a:spcPts val="600"/>
+              </a:spcBef>
+              <a:spcAft>
+                <a:spcPts val="0"/>
+              </a:spcAft>
+            </a:pPr>
+            <a:r>
+              <a:t>•  Live Render Deployment</a:t>
             </a:r>
           </a:p>
         </p:txBody>
